--- a/slides/ch04-revising-business-messages.pptx
+++ b/slides/ch04-revising-business-messages.pptx
@@ -27,6 +27,15 @@
     <p:sldId id="275" r:id="rId27"/>
     <p:sldId id="276" r:id="rId28"/>
     <p:sldId id="277" r:id="rId29"/>
+    <p:sldId id="278" r:id="rId30"/>
+    <p:sldId id="279" r:id="rId31"/>
+    <p:sldId id="280" r:id="rId32"/>
+    <p:sldId id="281" r:id="rId33"/>
+    <p:sldId id="282" r:id="rId34"/>
+    <p:sldId id="283" r:id="rId35"/>
+    <p:sldId id="284" r:id="rId36"/>
+    <p:sldId id="285" r:id="rId37"/>
+    <p:sldId id="286" r:id="rId38"/>
   </p:sldIdLst>
   <p:sldSz cx="12191695" cy="6858000" type="screen4x3"/>
   <p:notesSz cx="6858000" cy="9144000"/>
@@ -1223,7 +1232,7 @@
           <a:lstStyle/>
           <a:p>
             <a:r>
-              <a:t>Recap.</a:t>
+              <a:t>Section 5: tone as a revision altitude. A message can be structurally sound, concise, and error-free — and still land wrong.</a:t>
             </a:r>
           </a:p>
         </p:txBody>
@@ -1363,7 +1372,7 @@
           <a:lstStyle/>
           <a:p>
             <a:r>
-              <a:t>Closing frame.</a:t>
+              <a:t>Tone errors are invisible to every tool and most writers — they require deliberately switching seats. The forward test catches the sentences people regret most.</a:t>
             </a:r>
           </a:p>
         </p:txBody>
@@ -1433,7 +1442,7 @@
           <a:lstStyle/>
           <a:p>
             <a:r>
-              <a:t>Async-ready.</a:t>
+              <a:t>Frame: bias-free language is a precision skill — the biased version usually states something the writer didn't mean to claim. Shorter and more accurate, not censored.</a:t>
             </a:r>
           </a:p>
         </p:txBody>
@@ -1503,7 +1512,497 @@
           <a:lstStyle/>
           <a:p>
             <a:r>
-              <a:t>Delivery-neutral closing. Unit 2 complete.</a:t>
+              <a:t>Peer review etiquette. The reviewer's job is to make the document better AND keep the writer improving — both, not either.</a:t>
+            </a:r>
+          </a:p>
+        </p:txBody>
+      </p:sp>
+      <p:sp>
+        <p:nvSpPr>
+          <p:cNvPr id="4" name="Slide Number Placeholder 3"/>
+          <p:cNvSpPr>
+            <a:spLocks noGrp="1"/>
+          </p:cNvSpPr>
+          <p:nvPr>
+            <p:ph type="sldNum" idx="5" sz="quarter"/>
+          </p:nvPr>
+        </p:nvSpPr>
+        <p:spPr/>
+      </p:sp>
+    </p:spTree>
+  </p:cSld>
+  <p:clrMapOvr>
+    <a:masterClrMapping/>
+  </p:clrMapOvr>
+</p:notes>
+</file>
+
+<file path=ppt/notesSlides/notesSlide23.xml><?xml version="1.0" encoding="utf-8"?>
+<p:notes xmlns:a="http://schemas.openxmlformats.org/drawingml/2006/main" xmlns:p="http://schemas.openxmlformats.org/presentationml/2006/main" xmlns:r="http://schemas.openxmlformats.org/officeDocument/2006/relationships">
+  <p:cSld>
+    <p:spTree>
+      <p:nvGrpSpPr>
+        <p:cNvPr id="1" name=""/>
+        <p:cNvGrpSpPr/>
+        <p:nvPr/>
+      </p:nvGrpSpPr>
+      <p:grpSpPr>
+        <a:xfrm>
+          <a:off x="0" y="0"/>
+          <a:ext cx="0" cy="0"/>
+          <a:chOff x="0" y="0"/>
+          <a:chExt cx="0" cy="0"/>
+        </a:xfrm>
+      </p:grpSpPr>
+      <p:sp>
+        <p:nvSpPr>
+          <p:cNvPr id="2" name="Slide Image Placeholder 1"/>
+          <p:cNvSpPr>
+            <a:spLocks noGrp="1"/>
+          </p:cNvSpPr>
+          <p:nvPr>
+            <p:ph type="sldImg" idx="2"/>
+          </p:nvPr>
+        </p:nvSpPr>
+        <p:spPr/>
+      </p:sp>
+      <p:sp>
+        <p:nvSpPr>
+          <p:cNvPr id="3" name="Notes Placeholder 2"/>
+          <p:cNvSpPr>
+            <a:spLocks noGrp="1"/>
+          </p:cNvSpPr>
+          <p:nvPr>
+            <p:ph type="body" idx="3" sz="quarter"/>
+          </p:nvPr>
+        </p:nvSpPr>
+        <p:spPr/>
+        <p:txBody>
+          <a:bodyPr/>
+          <a:lstStyle/>
+          <a:p>
+            <a:r>
+              <a:t>The professional skill is separating identity from output. Writers who can't be edited stop being given important documents to write.</a:t>
+            </a:r>
+          </a:p>
+        </p:txBody>
+      </p:sp>
+      <p:sp>
+        <p:nvSpPr>
+          <p:cNvPr id="4" name="Slide Number Placeholder 3"/>
+          <p:cNvSpPr>
+            <a:spLocks noGrp="1"/>
+          </p:cNvSpPr>
+          <p:nvPr>
+            <p:ph type="sldNum" idx="5" sz="quarter"/>
+          </p:nvPr>
+        </p:nvSpPr>
+        <p:spPr/>
+      </p:sp>
+    </p:spTree>
+  </p:cSld>
+  <p:clrMapOvr>
+    <a:masterClrMapping/>
+  </p:clrMapOvr>
+</p:notes>
+</file>
+
+<file path=ppt/notesSlides/notesSlide24.xml><?xml version="1.0" encoding="utf-8"?>
+<p:notes xmlns:a="http://schemas.openxmlformats.org/drawingml/2006/main" xmlns:p="http://schemas.openxmlformats.org/presentationml/2006/main" xmlns:r="http://schemas.openxmlformats.org/officeDocument/2006/relationships">
+  <p:cSld>
+    <p:spTree>
+      <p:nvGrpSpPr>
+        <p:cNvPr id="1" name=""/>
+        <p:cNvGrpSpPr/>
+        <p:nvPr/>
+      </p:nvGrpSpPr>
+      <p:grpSpPr>
+        <a:xfrm>
+          <a:off x="0" y="0"/>
+          <a:ext cx="0" cy="0"/>
+          <a:chOff x="0" y="0"/>
+          <a:chExt cx="0" cy="0"/>
+        </a:xfrm>
+      </p:grpSpPr>
+      <p:sp>
+        <p:nvSpPr>
+          <p:cNvPr id="2" name="Slide Image Placeholder 1"/>
+          <p:cNvSpPr>
+            <a:spLocks noGrp="1"/>
+          </p:cNvSpPr>
+          <p:nvPr>
+            <p:ph type="sldImg" idx="2"/>
+          </p:nvPr>
+        </p:nvSpPr>
+        <p:spPr/>
+      </p:sp>
+      <p:sp>
+        <p:nvSpPr>
+          <p:cNvPr id="3" name="Notes Placeholder 2"/>
+          <p:cNvSpPr>
+            <a:spLocks noGrp="1"/>
+          </p:cNvSpPr>
+          <p:nvPr>
+            <p:ph type="body" idx="3" sz="quarter"/>
+          </p:nvPr>
+        </p:nvSpPr>
+        <p:spPr/>
+        <p:txBody>
+          <a:bodyPr/>
+          <a:lstStyle/>
+          <a:p>
+            <a:r>
+              <a:t>Section 6: deadline triage. The full system when there's time; the ranked shortlist when there isn't.</a:t>
+            </a:r>
+          </a:p>
+        </p:txBody>
+      </p:sp>
+      <p:sp>
+        <p:nvSpPr>
+          <p:cNvPr id="4" name="Slide Number Placeholder 3"/>
+          <p:cNvSpPr>
+            <a:spLocks noGrp="1"/>
+          </p:cNvSpPr>
+          <p:nvPr>
+            <p:ph type="sldNum" idx="5" sz="quarter"/>
+          </p:nvPr>
+        </p:nvSpPr>
+        <p:spPr/>
+      </p:sp>
+    </p:spTree>
+  </p:cSld>
+  <p:clrMapOvr>
+    <a:masterClrMapping/>
+  </p:clrMapOvr>
+</p:notes>
+</file>
+
+<file path=ppt/notesSlides/notesSlide25.xml><?xml version="1.0" encoding="utf-8"?>
+<p:notes xmlns:a="http://schemas.openxmlformats.org/drawingml/2006/main" xmlns:p="http://schemas.openxmlformats.org/presentationml/2006/main" xmlns:r="http://schemas.openxmlformats.org/officeDocument/2006/relationships">
+  <p:cSld>
+    <p:spTree>
+      <p:nvGrpSpPr>
+        <p:cNvPr id="1" name=""/>
+        <p:cNvGrpSpPr/>
+        <p:nvPr/>
+      </p:nvGrpSpPr>
+      <p:grpSpPr>
+        <a:xfrm>
+          <a:off x="0" y="0"/>
+          <a:ext cx="0" cy="0"/>
+          <a:chOff x="0" y="0"/>
+          <a:chExt cx="0" cy="0"/>
+        </a:xfrm>
+      </p:grpSpPr>
+      <p:sp>
+        <p:nvSpPr>
+          <p:cNvPr id="2" name="Slide Image Placeholder 1"/>
+          <p:cNvSpPr>
+            <a:spLocks noGrp="1"/>
+          </p:cNvSpPr>
+          <p:nvPr>
+            <p:ph type="sldImg" idx="2"/>
+          </p:nvPr>
+        </p:nvSpPr>
+        <p:spPr/>
+      </p:sp>
+      <p:sp>
+        <p:nvSpPr>
+          <p:cNvPr id="3" name="Notes Placeholder 2"/>
+          <p:cNvSpPr>
+            <a:spLocks noGrp="1"/>
+          </p:cNvSpPr>
+          <p:nvPr>
+            <p:ph type="body" idx="3" sz="quarter"/>
+          </p:nvPr>
+        </p:nvSpPr>
+        <p:spPr/>
+        <p:txBody>
+          <a:bodyPr/>
+          <a:lstStyle/>
+          <a:p>
+            <a:r>
+              <a:t>Triage logic: allocate scarce proofreading minutes by expected damage, not by document order. The last-thing check is first because those errors are both common and unrecoverable.</a:t>
+            </a:r>
+          </a:p>
+        </p:txBody>
+      </p:sp>
+      <p:sp>
+        <p:nvSpPr>
+          <p:cNvPr id="4" name="Slide Number Placeholder 3"/>
+          <p:cNvSpPr>
+            <a:spLocks noGrp="1"/>
+          </p:cNvSpPr>
+          <p:nvPr>
+            <p:ph type="sldNum" idx="5" sz="quarter"/>
+          </p:nvPr>
+        </p:nvSpPr>
+        <p:spPr/>
+      </p:sp>
+    </p:spTree>
+  </p:cSld>
+  <p:clrMapOvr>
+    <a:masterClrMapping/>
+  </p:clrMapOvr>
+</p:notes>
+</file>
+
+<file path=ppt/notesSlides/notesSlide26.xml><?xml version="1.0" encoding="utf-8"?>
+<p:notes xmlns:a="http://schemas.openxmlformats.org/drawingml/2006/main" xmlns:p="http://schemas.openxmlformats.org/presentationml/2006/main" xmlns:r="http://schemas.openxmlformats.org/officeDocument/2006/relationships">
+  <p:cSld>
+    <p:spTree>
+      <p:nvGrpSpPr>
+        <p:cNvPr id="1" name=""/>
+        <p:cNvGrpSpPr/>
+        <p:nvPr/>
+      </p:nvGrpSpPr>
+      <p:grpSpPr>
+        <a:xfrm>
+          <a:off x="0" y="0"/>
+          <a:ext cx="0" cy="0"/>
+          <a:chOff x="0" y="0"/>
+          <a:chExt cx="0" cy="0"/>
+        </a:xfrm>
+      </p:grpSpPr>
+      <p:sp>
+        <p:nvSpPr>
+          <p:cNvPr id="2" name="Slide Image Placeholder 1"/>
+          <p:cNvSpPr>
+            <a:spLocks noGrp="1"/>
+          </p:cNvSpPr>
+          <p:nvPr>
+            <p:ph type="sldImg" idx="2"/>
+          </p:nvPr>
+        </p:nvSpPr>
+        <p:spPr/>
+      </p:sp>
+      <p:sp>
+        <p:nvSpPr>
+          <p:cNvPr id="3" name="Notes Placeholder 2"/>
+          <p:cNvSpPr>
+            <a:spLocks noGrp="1"/>
+          </p:cNvSpPr>
+          <p:nvPr>
+            <p:ph type="body" idx="3" sz="quarter"/>
+          </p:nvPr>
+        </p:nvSpPr>
+        <p:spPr/>
+        <p:txBody>
+          <a:bodyPr/>
+          <a:lstStyle/>
+          <a:p>
+            <a:r>
+              <a:t>AI is the best pass-zero tool yet built and still misses the verification errors entirely. Treat it as a tireless junior reviewer, not a sign-off authority.</a:t>
+            </a:r>
+          </a:p>
+        </p:txBody>
+      </p:sp>
+      <p:sp>
+        <p:nvSpPr>
+          <p:cNvPr id="4" name="Slide Number Placeholder 3"/>
+          <p:cNvSpPr>
+            <a:spLocks noGrp="1"/>
+          </p:cNvSpPr>
+          <p:nvPr>
+            <p:ph type="sldNum" idx="5" sz="quarter"/>
+          </p:nvPr>
+        </p:nvSpPr>
+        <p:spPr/>
+      </p:sp>
+    </p:spTree>
+  </p:cSld>
+  <p:clrMapOvr>
+    <a:masterClrMapping/>
+  </p:clrMapOvr>
+</p:notes>
+</file>
+
+<file path=ppt/notesSlides/notesSlide27.xml><?xml version="1.0" encoding="utf-8"?>
+<p:notes xmlns:a="http://schemas.openxmlformats.org/drawingml/2006/main" xmlns:p="http://schemas.openxmlformats.org/presentationml/2006/main" xmlns:r="http://schemas.openxmlformats.org/officeDocument/2006/relationships">
+  <p:cSld>
+    <p:spTree>
+      <p:nvGrpSpPr>
+        <p:cNvPr id="1" name=""/>
+        <p:cNvGrpSpPr/>
+        <p:nvPr/>
+      </p:nvGrpSpPr>
+      <p:grpSpPr>
+        <a:xfrm>
+          <a:off x="0" y="0"/>
+          <a:ext cx="0" cy="0"/>
+          <a:chOff x="0" y="0"/>
+          <a:chExt cx="0" cy="0"/>
+        </a:xfrm>
+      </p:grpSpPr>
+      <p:sp>
+        <p:nvSpPr>
+          <p:cNvPr id="2" name="Slide Image Placeholder 1"/>
+          <p:cNvSpPr>
+            <a:spLocks noGrp="1"/>
+          </p:cNvSpPr>
+          <p:nvPr>
+            <p:ph type="sldImg" idx="2"/>
+          </p:nvPr>
+        </p:nvSpPr>
+        <p:spPr/>
+      </p:sp>
+      <p:sp>
+        <p:nvSpPr>
+          <p:cNvPr id="3" name="Notes Placeholder 2"/>
+          <p:cNvSpPr>
+            <a:spLocks noGrp="1"/>
+          </p:cNvSpPr>
+          <p:nvPr>
+            <p:ph type="body" idx="3" sz="quarter"/>
+          </p:nvPr>
+        </p:nvSpPr>
+        <p:spPr/>
+        <p:txBody>
+          <a:bodyPr/>
+          <a:lstStyle/>
+          <a:p>
+            <a:r>
+              <a:t>Ties conciseness, active voice, and concreteness to tone. The rewrite is shorter, riskier-feeling to write, and completely disarming to receive — Chapter 7 develops this fully.</a:t>
+            </a:r>
+          </a:p>
+        </p:txBody>
+      </p:sp>
+      <p:sp>
+        <p:nvSpPr>
+          <p:cNvPr id="4" name="Slide Number Placeholder 3"/>
+          <p:cNvSpPr>
+            <a:spLocks noGrp="1"/>
+          </p:cNvSpPr>
+          <p:nvPr>
+            <p:ph type="sldNum" idx="5" sz="quarter"/>
+          </p:nvPr>
+        </p:nvSpPr>
+        <p:spPr/>
+      </p:sp>
+    </p:spTree>
+  </p:cSld>
+  <p:clrMapOvr>
+    <a:masterClrMapping/>
+  </p:clrMapOvr>
+</p:notes>
+</file>
+
+<file path=ppt/notesSlides/notesSlide28.xml><?xml version="1.0" encoding="utf-8"?>
+<p:notes xmlns:a="http://schemas.openxmlformats.org/drawingml/2006/main" xmlns:p="http://schemas.openxmlformats.org/presentationml/2006/main" xmlns:r="http://schemas.openxmlformats.org/officeDocument/2006/relationships">
+  <p:cSld>
+    <p:spTree>
+      <p:nvGrpSpPr>
+        <p:cNvPr id="1" name=""/>
+        <p:cNvGrpSpPr/>
+        <p:nvPr/>
+      </p:nvGrpSpPr>
+      <p:grpSpPr>
+        <a:xfrm>
+          <a:off x="0" y="0"/>
+          <a:ext cx="0" cy="0"/>
+          <a:chOff x="0" y="0"/>
+          <a:chExt cx="0" cy="0"/>
+        </a:xfrm>
+      </p:grpSpPr>
+      <p:sp>
+        <p:nvSpPr>
+          <p:cNvPr id="2" name="Slide Image Placeholder 1"/>
+          <p:cNvSpPr>
+            <a:spLocks noGrp="1"/>
+          </p:cNvSpPr>
+          <p:nvPr>
+            <p:ph type="sldImg" idx="2"/>
+          </p:nvPr>
+        </p:nvSpPr>
+        <p:spPr/>
+      </p:sp>
+      <p:sp>
+        <p:nvSpPr>
+          <p:cNvPr id="3" name="Notes Placeholder 2"/>
+          <p:cNvSpPr>
+            <a:spLocks noGrp="1"/>
+          </p:cNvSpPr>
+          <p:nvPr>
+            <p:ph type="body" idx="3" sz="quarter"/>
+          </p:nvPr>
+        </p:nvSpPr>
+        <p:spPr/>
+        <p:txBody>
+          <a:bodyPr/>
+          <a:lstStyle/>
+          <a:p>
+            <a:r>
+              <a:t>Recap.</a:t>
+            </a:r>
+          </a:p>
+        </p:txBody>
+      </p:sp>
+      <p:sp>
+        <p:nvSpPr>
+          <p:cNvPr id="4" name="Slide Number Placeholder 3"/>
+          <p:cNvSpPr>
+            <a:spLocks noGrp="1"/>
+          </p:cNvSpPr>
+          <p:nvPr>
+            <p:ph type="sldNum" idx="5" sz="quarter"/>
+          </p:nvPr>
+        </p:nvSpPr>
+        <p:spPr/>
+      </p:sp>
+    </p:spTree>
+  </p:cSld>
+  <p:clrMapOvr>
+    <a:masterClrMapping/>
+  </p:clrMapOvr>
+</p:notes>
+</file>
+
+<file path=ppt/notesSlides/notesSlide29.xml><?xml version="1.0" encoding="utf-8"?>
+<p:notes xmlns:a="http://schemas.openxmlformats.org/drawingml/2006/main" xmlns:p="http://schemas.openxmlformats.org/presentationml/2006/main" xmlns:r="http://schemas.openxmlformats.org/officeDocument/2006/relationships">
+  <p:cSld>
+    <p:spTree>
+      <p:nvGrpSpPr>
+        <p:cNvPr id="1" name=""/>
+        <p:cNvGrpSpPr/>
+        <p:nvPr/>
+      </p:nvGrpSpPr>
+      <p:grpSpPr>
+        <a:xfrm>
+          <a:off x="0" y="0"/>
+          <a:ext cx="0" cy="0"/>
+          <a:chOff x="0" y="0"/>
+          <a:chExt cx="0" cy="0"/>
+        </a:xfrm>
+      </p:grpSpPr>
+      <p:sp>
+        <p:nvSpPr>
+          <p:cNvPr id="2" name="Slide Image Placeholder 1"/>
+          <p:cNvSpPr>
+            <a:spLocks noGrp="1"/>
+          </p:cNvSpPr>
+          <p:nvPr>
+            <p:ph type="sldImg" idx="2"/>
+          </p:nvPr>
+        </p:nvSpPr>
+        <p:spPr/>
+      </p:sp>
+      <p:sp>
+        <p:nvSpPr>
+          <p:cNvPr id="3" name="Notes Placeholder 2"/>
+          <p:cNvSpPr>
+            <a:spLocks noGrp="1"/>
+          </p:cNvSpPr>
+          <p:nvPr>
+            <p:ph type="body" idx="3" sz="quarter"/>
+          </p:nvPr>
+        </p:nvSpPr>
+        <p:spPr/>
+        <p:txBody>
+          <a:bodyPr/>
+          <a:lstStyle/>
+          <a:p>
+            <a:r>
+              <a:t>Closing frame.</a:t>
             </a:r>
           </a:p>
         </p:txBody>
@@ -1574,6 +2073,146 @@
           <a:p>
             <a:r>
               <a:t>Section 1.</a:t>
+            </a:r>
+          </a:p>
+        </p:txBody>
+      </p:sp>
+      <p:sp>
+        <p:nvSpPr>
+          <p:cNvPr id="4" name="Slide Number Placeholder 3"/>
+          <p:cNvSpPr>
+            <a:spLocks noGrp="1"/>
+          </p:cNvSpPr>
+          <p:nvPr>
+            <p:ph type="sldNum" idx="5" sz="quarter"/>
+          </p:nvPr>
+        </p:nvSpPr>
+        <p:spPr/>
+      </p:sp>
+    </p:spTree>
+  </p:cSld>
+  <p:clrMapOvr>
+    <a:masterClrMapping/>
+  </p:clrMapOvr>
+</p:notes>
+</file>
+
+<file path=ppt/notesSlides/notesSlide30.xml><?xml version="1.0" encoding="utf-8"?>
+<p:notes xmlns:a="http://schemas.openxmlformats.org/drawingml/2006/main" xmlns:p="http://schemas.openxmlformats.org/presentationml/2006/main" xmlns:r="http://schemas.openxmlformats.org/officeDocument/2006/relationships">
+  <p:cSld>
+    <p:spTree>
+      <p:nvGrpSpPr>
+        <p:cNvPr id="1" name=""/>
+        <p:cNvGrpSpPr/>
+        <p:nvPr/>
+      </p:nvGrpSpPr>
+      <p:grpSpPr>
+        <a:xfrm>
+          <a:off x="0" y="0"/>
+          <a:ext cx="0" cy="0"/>
+          <a:chOff x="0" y="0"/>
+          <a:chExt cx="0" cy="0"/>
+        </a:xfrm>
+      </p:grpSpPr>
+      <p:sp>
+        <p:nvSpPr>
+          <p:cNvPr id="2" name="Slide Image Placeholder 1"/>
+          <p:cNvSpPr>
+            <a:spLocks noGrp="1"/>
+          </p:cNvSpPr>
+          <p:nvPr>
+            <p:ph type="sldImg" idx="2"/>
+          </p:nvPr>
+        </p:nvSpPr>
+        <p:spPr/>
+      </p:sp>
+      <p:sp>
+        <p:nvSpPr>
+          <p:cNvPr id="3" name="Notes Placeholder 2"/>
+          <p:cNvSpPr>
+            <a:spLocks noGrp="1"/>
+          </p:cNvSpPr>
+          <p:nvPr>
+            <p:ph type="body" idx="3" sz="quarter"/>
+          </p:nvPr>
+        </p:nvSpPr>
+        <p:spPr/>
+        <p:txBody>
+          <a:bodyPr/>
+          <a:lstStyle/>
+          <a:p>
+            <a:r>
+              <a:t>Async-ready.</a:t>
+            </a:r>
+          </a:p>
+        </p:txBody>
+      </p:sp>
+      <p:sp>
+        <p:nvSpPr>
+          <p:cNvPr id="4" name="Slide Number Placeholder 3"/>
+          <p:cNvSpPr>
+            <a:spLocks noGrp="1"/>
+          </p:cNvSpPr>
+          <p:nvPr>
+            <p:ph type="sldNum" idx="5" sz="quarter"/>
+          </p:nvPr>
+        </p:nvSpPr>
+        <p:spPr/>
+      </p:sp>
+    </p:spTree>
+  </p:cSld>
+  <p:clrMapOvr>
+    <a:masterClrMapping/>
+  </p:clrMapOvr>
+</p:notes>
+</file>
+
+<file path=ppt/notesSlides/notesSlide31.xml><?xml version="1.0" encoding="utf-8"?>
+<p:notes xmlns:a="http://schemas.openxmlformats.org/drawingml/2006/main" xmlns:p="http://schemas.openxmlformats.org/presentationml/2006/main" xmlns:r="http://schemas.openxmlformats.org/officeDocument/2006/relationships">
+  <p:cSld>
+    <p:spTree>
+      <p:nvGrpSpPr>
+        <p:cNvPr id="1" name=""/>
+        <p:cNvGrpSpPr/>
+        <p:nvPr/>
+      </p:nvGrpSpPr>
+      <p:grpSpPr>
+        <a:xfrm>
+          <a:off x="0" y="0"/>
+          <a:ext cx="0" cy="0"/>
+          <a:chOff x="0" y="0"/>
+          <a:chExt cx="0" cy="0"/>
+        </a:xfrm>
+      </p:grpSpPr>
+      <p:sp>
+        <p:nvSpPr>
+          <p:cNvPr id="2" name="Slide Image Placeholder 1"/>
+          <p:cNvSpPr>
+            <a:spLocks noGrp="1"/>
+          </p:cNvSpPr>
+          <p:nvPr>
+            <p:ph type="sldImg" idx="2"/>
+          </p:nvPr>
+        </p:nvSpPr>
+        <p:spPr/>
+      </p:sp>
+      <p:sp>
+        <p:nvSpPr>
+          <p:cNvPr id="3" name="Notes Placeholder 2"/>
+          <p:cNvSpPr>
+            <a:spLocks noGrp="1"/>
+          </p:cNvSpPr>
+          <p:nvPr>
+            <p:ph type="body" idx="3" sz="quarter"/>
+          </p:nvPr>
+        </p:nvSpPr>
+        <p:spPr/>
+        <p:txBody>
+          <a:bodyPr/>
+          <a:lstStyle/>
+          <a:p>
+            <a:r>
+              <a:t>Delivery-neutral closing. Unit 2 complete.</a:t>
             </a:r>
           </a:p>
         </p:txBody>
@@ -8557,7 +9196,7 @@
     <p:bg>
       <p:bgPr>
         <a:solidFill>
-          <a:srgbClr val="FFFFFF"/>
+          <a:srgbClr val="0E4D33"/>
         </a:solidFill>
         <a:effectLst/>
       </p:bgPr>
@@ -8571,7 +9210,7 @@
       <p:grpSpPr/>
       <p:sp>
         <p:nvSpPr>
-          <p:cNvPr id="2" name="Title 1" descr="Slide title: Key takeaways"/>
+          <p:cNvPr id="2" name="Title 1" descr="Slide title: The tone pass"/>
           <p:cNvSpPr>
             <a:spLocks noGrp="1"/>
           </p:cNvSpPr>
@@ -8581,8 +9220,8 @@
         </p:nvSpPr>
         <p:spPr>
           <a:xfrm>
-            <a:off x="502920" y="411480"/>
-            <a:ext cx="11155680" cy="914400"/>
+            <a:off x="822960" y="2834640"/>
+            <a:ext cx="10515600" cy="914400"/>
           </a:xfrm>
         </p:spPr>
         <p:txBody>
@@ -8591,149 +9230,27 @@
           <a:p>
             <a:pPr algn="l"/>
             <a:r>
-              <a:rPr sz="3200" b="1">
-                <a:solidFill>
-                  <a:srgbClr val="0E4D33"/>
+              <a:rPr sz="4000" b="1">
+                <a:solidFill>
+                  <a:srgbClr val="FFFFFF"/>
                 </a:solidFill>
                 <a:latin typeface="Cambria"/>
               </a:rPr>
-              <a:t>Key takeaways</a:t>
-            </a:r>
-          </a:p>
-        </p:txBody>
-      </p:sp>
-      <p:sp>
-        <p:nvSpPr>
-          <p:cNvPr id="3" name="TextBox 2" descr="Footer: BADM 225 · Chapter 4"/>
+              <a:t>The tone pass</a:t>
+            </a:r>
+          </a:p>
+        </p:txBody>
+      </p:sp>
+      <p:sp>
+        <p:nvSpPr>
+          <p:cNvPr id="3" name="TextBox 2" descr="Section number 05"/>
           <p:cNvSpPr txBox="1"/>
           <p:nvPr/>
         </p:nvSpPr>
         <p:spPr>
           <a:xfrm>
-            <a:off x="502920" y="6446520"/>
-            <a:ext cx="5486400" cy="320040"/>
-          </a:xfrm>
-          <a:prstGeom prst="rect">
-            <a:avLst/>
-          </a:prstGeom>
-          <a:noFill/>
-        </p:spPr>
-        <p:txBody>
-          <a:bodyPr wrap="none">
-            <a:spAutoFit/>
-          </a:bodyPr>
-          <a:lstStyle/>
-          <a:p>
-            <a:r>
-              <a:rPr sz="1000">
-                <a:solidFill>
-                  <a:srgbClr val="5E6B64"/>
-                </a:solidFill>
-                <a:latin typeface="Calibri"/>
-              </a:rPr>
-              <a:t>BADM 225 · Chapter 4</a:t>
-            </a:r>
-          </a:p>
-        </p:txBody>
-      </p:sp>
-      <p:sp>
-        <p:nvSpPr>
-          <p:cNvPr id="4" name="TextBox 3" descr="Slide number 19"/>
-          <p:cNvSpPr txBox="1"/>
-          <p:nvPr/>
-        </p:nvSpPr>
-        <p:spPr>
-          <a:xfrm>
-            <a:off x="11247120" y="6446520"/>
-            <a:ext cx="640080" cy="320040"/>
-          </a:xfrm>
-          <a:prstGeom prst="rect">
-            <a:avLst/>
-          </a:prstGeom>
-          <a:noFill/>
-        </p:spPr>
-        <p:txBody>
-          <a:bodyPr wrap="none">
-            <a:spAutoFit/>
-          </a:bodyPr>
-          <a:lstStyle/>
-          <a:p>
-            <a:pPr algn="r"/>
-            <a:r>
-              <a:rPr sz="1000">
-                <a:solidFill>
-                  <a:srgbClr val="5E6B64"/>
-                </a:solidFill>
-                <a:latin typeface="Calibri"/>
-              </a:rPr>
-              <a:t>19</a:t>
-            </a:r>
-          </a:p>
-        </p:txBody>
-      </p:sp>
-      <p:sp>
-        <p:nvSpPr>
-          <p:cNvPr id="5" name="Oval 4" descr="Checkmark"/>
-          <p:cNvSpPr/>
-          <p:nvPr/>
-        </p:nvSpPr>
-        <p:spPr>
-          <a:xfrm>
-            <a:off x="640080" y="1572768"/>
-            <a:ext cx="420624" cy="420624"/>
-          </a:xfrm>
-          <a:prstGeom prst="ellipse">
-            <a:avLst/>
-          </a:prstGeom>
-          <a:solidFill>
-            <a:srgbClr val="0E4D33"/>
-          </a:solidFill>
-          <a:ln>
-            <a:noFill/>
-          </a:ln>
-          <a:effectLst/>
-        </p:spPr>
-        <p:style>
-          <a:lnRef idx="1">
-            <a:schemeClr val="accent1"/>
-          </a:lnRef>
-          <a:fillRef idx="3">
-            <a:schemeClr val="accent1"/>
-          </a:fillRef>
-          <a:effectRef idx="2">
-            <a:schemeClr val="accent1"/>
-          </a:effectRef>
-          <a:fontRef idx="minor">
-            <a:schemeClr val="lt1"/>
-          </a:fontRef>
-        </p:style>
-        <p:txBody>
-          <a:bodyPr rtlCol="0" anchor="ctr" lIns="0" rIns="0" tIns="0" bIns="0"/>
-          <a:lstStyle/>
-          <a:p>
-            <a:pPr algn="ctr"/>
-            <a:r>
-              <a:rPr sz="1100" b="1">
-                <a:solidFill>
-                  <a:srgbClr val="FFFFFF"/>
-                </a:solidFill>
-                <a:latin typeface="Calibri"/>
-              </a:rPr>
-              <a:t>✓</a:t>
-            </a:r>
-          </a:p>
-        </p:txBody>
-      </p:sp>
-      <p:sp>
-        <p:nvSpPr>
-          <p:cNvPr id="6" name="TextBox 5" descr="Takeaway 1"/>
-          <p:cNvSpPr txBox="1"/>
-          <p:nvPr/>
-        </p:nvSpPr>
-        <p:spPr>
-          <a:xfrm>
-            <a:off x="1325880" y="1554480"/>
-            <a:ext cx="10332720" cy="640080"/>
+            <a:off x="822960" y="1188720"/>
+            <a:ext cx="2743200" cy="1463040"/>
           </a:xfrm>
           <a:prstGeom prst="rect">
             <a:avLst/>
@@ -8752,80 +9269,27 @@
               </a:spcAft>
             </a:pPr>
             <a:r>
-              <a:rPr sz="1550" b="0" i="0">
-                <a:solidFill>
-                  <a:srgbClr val="212A26"/>
-                </a:solidFill>
-                <a:latin typeface="Calibri"/>
-              </a:rPr>
-              <a:t>Three passes at three altitudes: structure, sentences, proof — never one anxious reread.</a:t>
-            </a:r>
-          </a:p>
-        </p:txBody>
-      </p:sp>
-      <p:sp>
-        <p:nvSpPr>
-          <p:cNvPr id="7" name="Oval 6" descr="Checkmark"/>
-          <p:cNvSpPr/>
-          <p:nvPr/>
-        </p:nvSpPr>
-        <p:spPr>
-          <a:xfrm>
-            <a:off x="640080" y="2212848"/>
-            <a:ext cx="420624" cy="420624"/>
-          </a:xfrm>
-          <a:prstGeom prst="ellipse">
-            <a:avLst/>
-          </a:prstGeom>
-          <a:solidFill>
-            <a:srgbClr val="0E4D33"/>
-          </a:solidFill>
-          <a:ln>
-            <a:noFill/>
-          </a:ln>
-          <a:effectLst/>
-        </p:spPr>
-        <p:style>
-          <a:lnRef idx="1">
-            <a:schemeClr val="accent1"/>
-          </a:lnRef>
-          <a:fillRef idx="3">
-            <a:schemeClr val="accent1"/>
-          </a:fillRef>
-          <a:effectRef idx="2">
-            <a:schemeClr val="accent1"/>
-          </a:effectRef>
-          <a:fontRef idx="minor">
-            <a:schemeClr val="lt1"/>
-          </a:fontRef>
-        </p:style>
-        <p:txBody>
-          <a:bodyPr rtlCol="0" anchor="ctr" lIns="0" rIns="0" tIns="0" bIns="0"/>
-          <a:lstStyle/>
-          <a:p>
-            <a:pPr algn="ctr"/>
-            <a:r>
-              <a:rPr sz="1100" b="1">
-                <a:solidFill>
-                  <a:srgbClr val="FFFFFF"/>
-                </a:solidFill>
-                <a:latin typeface="Calibri"/>
-              </a:rPr>
-              <a:t>✓</a:t>
-            </a:r>
-          </a:p>
-        </p:txBody>
-      </p:sp>
-      <p:sp>
-        <p:nvSpPr>
-          <p:cNvPr id="8" name="TextBox 7" descr="Takeaway 2"/>
+              <a:rPr sz="8000" b="1" i="0">
+                <a:solidFill>
+                  <a:srgbClr val="C9931A"/>
+                </a:solidFill>
+                <a:latin typeface="Cambria"/>
+              </a:rPr>
+              <a:t>05</a:t>
+            </a:r>
+          </a:p>
+        </p:txBody>
+      </p:sp>
+      <p:sp>
+        <p:nvSpPr>
+          <p:cNvPr id="4" name="TextBox 3" descr="Section note"/>
           <p:cNvSpPr txBox="1"/>
           <p:nvPr/>
         </p:nvSpPr>
         <p:spPr>
           <a:xfrm>
-            <a:off x="1325880" y="2194560"/>
-            <a:ext cx="10332720" cy="640080"/>
+            <a:off x="822960" y="4023360"/>
+            <a:ext cx="9601200" cy="1097280"/>
           </a:xfrm>
           <a:prstGeom prst="rect">
             <a:avLst/>
@@ -8844,80 +9308,27 @@
               </a:spcAft>
             </a:pPr>
             <a:r>
-              <a:rPr sz="1550" b="0" i="0">
-                <a:solidFill>
-                  <a:srgbClr val="212A26"/>
-                </a:solidFill>
-                <a:latin typeface="Calibri"/>
-              </a:rPr>
-              <a:t>Cool the draft; distance converts the writer back into a reader.</a:t>
-            </a:r>
-          </a:p>
-        </p:txBody>
-      </p:sp>
-      <p:sp>
-        <p:nvSpPr>
-          <p:cNvPr id="9" name="Oval 8" descr="Checkmark"/>
-          <p:cNvSpPr/>
-          <p:nvPr/>
-        </p:nvSpPr>
-        <p:spPr>
-          <a:xfrm>
-            <a:off x="640080" y="2852928"/>
-            <a:ext cx="420624" cy="420624"/>
-          </a:xfrm>
-          <a:prstGeom prst="ellipse">
-            <a:avLst/>
-          </a:prstGeom>
-          <a:solidFill>
-            <a:srgbClr val="0E4D33"/>
-          </a:solidFill>
-          <a:ln>
-            <a:noFill/>
-          </a:ln>
-          <a:effectLst/>
-        </p:spPr>
-        <p:style>
-          <a:lnRef idx="1">
-            <a:schemeClr val="accent1"/>
-          </a:lnRef>
-          <a:fillRef idx="3">
-            <a:schemeClr val="accent1"/>
-          </a:fillRef>
-          <a:effectRef idx="2">
-            <a:schemeClr val="accent1"/>
-          </a:effectRef>
-          <a:fontRef idx="minor">
-            <a:schemeClr val="lt1"/>
-          </a:fontRef>
-        </p:style>
-        <p:txBody>
-          <a:bodyPr rtlCol="0" anchor="ctr" lIns="0" rIns="0" tIns="0" bIns="0"/>
-          <a:lstStyle/>
-          <a:p>
-            <a:pPr algn="ctr"/>
-            <a:r>
-              <a:rPr sz="1100" b="1">
-                <a:solidFill>
-                  <a:srgbClr val="FFFFFF"/>
-                </a:solidFill>
-                <a:latin typeface="Calibri"/>
-              </a:rPr>
-              <a:t>✓</a:t>
-            </a:r>
-          </a:p>
-        </p:txBody>
-      </p:sp>
-      <p:sp>
-        <p:nvSpPr>
-          <p:cNvPr id="10" name="TextBox 9" descr="Takeaway 3"/>
+              <a:rPr sz="1700" b="0" i="0">
+                <a:solidFill>
+                  <a:srgbClr val="EAF1EB"/>
+                </a:solidFill>
+                <a:latin typeface="Calibri"/>
+              </a:rPr>
+              <a:t>Correct isn't the same as right. Read once more for how it sounds.</a:t>
+            </a:r>
+          </a:p>
+        </p:txBody>
+      </p:sp>
+      <p:sp>
+        <p:nvSpPr>
+          <p:cNvPr id="5" name="TextBox 4" descr="Footer: BADM 225 · Chapter 4"/>
           <p:cNvSpPr txBox="1"/>
           <p:nvPr/>
         </p:nvSpPr>
         <p:spPr>
           <a:xfrm>
-            <a:off x="1325880" y="2834640"/>
-            <a:ext cx="10332720" cy="640080"/>
+            <a:off x="502920" y="6446520"/>
+            <a:ext cx="5486400" cy="320040"/>
           </a:xfrm>
           <a:prstGeom prst="rect">
             <a:avLst/>
@@ -8925,91 +9336,33 @@
           <a:noFill/>
         </p:spPr>
         <p:txBody>
-          <a:bodyPr wrap="square">
+          <a:bodyPr wrap="none">
             <a:spAutoFit/>
           </a:bodyPr>
           <a:lstStyle/>
           <a:p>
-            <a:pPr algn="l">
-              <a:spcAft>
-                <a:spcPts val="800"/>
-              </a:spcAft>
-            </a:pPr>
-            <a:r>
-              <a:rPr sz="1550" b="0" i="0">
-                <a:solidFill>
-                  <a:srgbClr val="212A26"/>
-                </a:solidFill>
-                <a:latin typeface="Calibri"/>
-              </a:rPr>
-              <a:t>Cut the six flab targets on sight; omit needless words.</a:t>
-            </a:r>
-          </a:p>
-        </p:txBody>
-      </p:sp>
-      <p:sp>
-        <p:nvSpPr>
-          <p:cNvPr id="11" name="Oval 10" descr="Checkmark"/>
-          <p:cNvSpPr/>
-          <p:nvPr/>
-        </p:nvSpPr>
-        <p:spPr>
-          <a:xfrm>
-            <a:off x="640080" y="3493008"/>
-            <a:ext cx="420624" cy="420624"/>
-          </a:xfrm>
-          <a:prstGeom prst="ellipse">
-            <a:avLst/>
-          </a:prstGeom>
-          <a:solidFill>
-            <a:srgbClr val="0E4D33"/>
-          </a:solidFill>
-          <a:ln>
-            <a:noFill/>
-          </a:ln>
-          <a:effectLst/>
-        </p:spPr>
-        <p:style>
-          <a:lnRef idx="1">
-            <a:schemeClr val="accent1"/>
-          </a:lnRef>
-          <a:fillRef idx="3">
-            <a:schemeClr val="accent1"/>
-          </a:fillRef>
-          <a:effectRef idx="2">
-            <a:schemeClr val="accent1"/>
-          </a:effectRef>
-          <a:fontRef idx="minor">
-            <a:schemeClr val="lt1"/>
-          </a:fontRef>
-        </p:style>
-        <p:txBody>
-          <a:bodyPr rtlCol="0" anchor="ctr" lIns="0" rIns="0" tIns="0" bIns="0"/>
-          <a:lstStyle/>
-          <a:p>
-            <a:pPr algn="ctr"/>
-            <a:r>
-              <a:rPr sz="1100" b="1">
-                <a:solidFill>
-                  <a:srgbClr val="FFFFFF"/>
-                </a:solidFill>
-                <a:latin typeface="Calibri"/>
-              </a:rPr>
-              <a:t>✓</a:t>
-            </a:r>
-          </a:p>
-        </p:txBody>
-      </p:sp>
-      <p:sp>
-        <p:nvSpPr>
-          <p:cNvPr id="12" name="TextBox 11" descr="Takeaway 4"/>
+            <a:r>
+              <a:rPr sz="1000">
+                <a:solidFill>
+                  <a:srgbClr val="5E6B64"/>
+                </a:solidFill>
+                <a:latin typeface="Calibri"/>
+              </a:rPr>
+              <a:t>BADM 225 · Chapter 4</a:t>
+            </a:r>
+          </a:p>
+        </p:txBody>
+      </p:sp>
+      <p:sp>
+        <p:nvSpPr>
+          <p:cNvPr id="6" name="TextBox 5" descr="Slide number 19"/>
           <p:cNvSpPr txBox="1"/>
           <p:nvPr/>
         </p:nvSpPr>
         <p:spPr>
           <a:xfrm>
-            <a:off x="1325880" y="3474720"/>
-            <a:ext cx="10332720" cy="640080"/>
+            <a:off x="11247120" y="6446520"/>
+            <a:ext cx="640080" cy="320040"/>
           </a:xfrm>
           <a:prstGeom prst="rect">
             <a:avLst/>
@@ -9017,265 +9370,20 @@
           <a:noFill/>
         </p:spPr>
         <p:txBody>
-          <a:bodyPr wrap="square">
+          <a:bodyPr wrap="none">
             <a:spAutoFit/>
           </a:bodyPr>
           <a:lstStyle/>
           <a:p>
-            <a:pPr algn="l">
-              <a:spcAft>
-                <a:spcPts val="800"/>
-              </a:spcAft>
-            </a:pPr>
-            <a:r>
-              <a:rPr sz="1550" b="0" i="0">
-                <a:solidFill>
-                  <a:srgbClr val="212A26"/>
-                </a:solidFill>
-                <a:latin typeface="Calibri"/>
-              </a:rPr>
-              <a:t>Climb down the abstraction ladder until claims are checkable.</a:t>
-            </a:r>
-          </a:p>
-        </p:txBody>
-      </p:sp>
-      <p:sp>
-        <p:nvSpPr>
-          <p:cNvPr id="13" name="Oval 12" descr="Checkmark"/>
-          <p:cNvSpPr/>
-          <p:nvPr/>
-        </p:nvSpPr>
-        <p:spPr>
-          <a:xfrm>
-            <a:off x="640080" y="4133088"/>
-            <a:ext cx="420624" cy="420624"/>
-          </a:xfrm>
-          <a:prstGeom prst="ellipse">
-            <a:avLst/>
-          </a:prstGeom>
-          <a:solidFill>
-            <a:srgbClr val="0E4D33"/>
-          </a:solidFill>
-          <a:ln>
-            <a:noFill/>
-          </a:ln>
-          <a:effectLst/>
-        </p:spPr>
-        <p:style>
-          <a:lnRef idx="1">
-            <a:schemeClr val="accent1"/>
-          </a:lnRef>
-          <a:fillRef idx="3">
-            <a:schemeClr val="accent1"/>
-          </a:fillRef>
-          <a:effectRef idx="2">
-            <a:schemeClr val="accent1"/>
-          </a:effectRef>
-          <a:fontRef idx="minor">
-            <a:schemeClr val="lt1"/>
-          </a:fontRef>
-        </p:style>
-        <p:txBody>
-          <a:bodyPr rtlCol="0" anchor="ctr" lIns="0" rIns="0" tIns="0" bIns="0"/>
-          <a:lstStyle/>
-          <a:p>
-            <a:pPr algn="ctr"/>
-            <a:r>
-              <a:rPr sz="1100" b="1">
-                <a:solidFill>
-                  <a:srgbClr val="FFFFFF"/>
-                </a:solidFill>
-                <a:latin typeface="Calibri"/>
-              </a:rPr>
-              <a:t>✓</a:t>
-            </a:r>
-          </a:p>
-        </p:txBody>
-      </p:sp>
-      <p:sp>
-        <p:nvSpPr>
-          <p:cNvPr id="14" name="TextBox 13" descr="Takeaway 5"/>
-          <p:cNvSpPr txBox="1"/>
-          <p:nvPr/>
-        </p:nvSpPr>
-        <p:spPr>
-          <a:xfrm>
-            <a:off x="1325880" y="4114800"/>
-            <a:ext cx="10332720" cy="640080"/>
-          </a:xfrm>
-          <a:prstGeom prst="rect">
-            <a:avLst/>
-          </a:prstGeom>
-          <a:noFill/>
-        </p:spPr>
-        <p:txBody>
-          <a:bodyPr wrap="square">
-            <a:spAutoFit/>
-          </a:bodyPr>
-          <a:lstStyle/>
-          <a:p>
-            <a:pPr algn="l">
-              <a:spcAft>
-                <a:spcPts val="800"/>
-              </a:spcAft>
-            </a:pPr>
-            <a:r>
-              <a:rPr sz="1550" b="0" i="0">
-                <a:solidFill>
-                  <a:srgbClr val="212A26"/>
-                </a:solidFill>
-                <a:latin typeface="Calibri"/>
-              </a:rPr>
-              <a:t>Verify names, numbers, and dates against sources — spellcheck cannot see the high-stakes errors.</a:t>
-            </a:r>
-          </a:p>
-        </p:txBody>
-      </p:sp>
-      <p:sp>
-        <p:nvSpPr>
-          <p:cNvPr id="15" name="Oval 14" descr="Checkmark"/>
-          <p:cNvSpPr/>
-          <p:nvPr/>
-        </p:nvSpPr>
-        <p:spPr>
-          <a:xfrm>
-            <a:off x="640080" y="4773168"/>
-            <a:ext cx="420624" cy="420624"/>
-          </a:xfrm>
-          <a:prstGeom prst="ellipse">
-            <a:avLst/>
-          </a:prstGeom>
-          <a:solidFill>
-            <a:srgbClr val="0E4D33"/>
-          </a:solidFill>
-          <a:ln>
-            <a:noFill/>
-          </a:ln>
-          <a:effectLst/>
-        </p:spPr>
-        <p:style>
-          <a:lnRef idx="1">
-            <a:schemeClr val="accent1"/>
-          </a:lnRef>
-          <a:fillRef idx="3">
-            <a:schemeClr val="accent1"/>
-          </a:fillRef>
-          <a:effectRef idx="2">
-            <a:schemeClr val="accent1"/>
-          </a:effectRef>
-          <a:fontRef idx="minor">
-            <a:schemeClr val="lt1"/>
-          </a:fontRef>
-        </p:style>
-        <p:txBody>
-          <a:bodyPr rtlCol="0" anchor="ctr" lIns="0" rIns="0" tIns="0" bIns="0"/>
-          <a:lstStyle/>
-          <a:p>
-            <a:pPr algn="ctr"/>
-            <a:r>
-              <a:rPr sz="1100" b="1">
-                <a:solidFill>
-                  <a:srgbClr val="FFFFFF"/>
-                </a:solidFill>
-                <a:latin typeface="Calibri"/>
-              </a:rPr>
-              <a:t>✓</a:t>
-            </a:r>
-          </a:p>
-        </p:txBody>
-      </p:sp>
-      <p:sp>
-        <p:nvSpPr>
-          <p:cNvPr id="16" name="TextBox 15" descr="Takeaway 6"/>
-          <p:cNvSpPr txBox="1"/>
-          <p:nvPr/>
-        </p:nvSpPr>
-        <p:spPr>
-          <a:xfrm>
-            <a:off x="1325880" y="4754880"/>
-            <a:ext cx="10332720" cy="640080"/>
-          </a:xfrm>
-          <a:prstGeom prst="rect">
-            <a:avLst/>
-          </a:prstGeom>
-          <a:noFill/>
-        </p:spPr>
-        <p:txBody>
-          <a:bodyPr wrap="square">
-            <a:spAutoFit/>
-          </a:bodyPr>
-          <a:lstStyle/>
-          <a:p>
-            <a:pPr algn="l">
-              <a:spcAft>
-                <a:spcPts val="800"/>
-              </a:spcAft>
-            </a:pPr>
-            <a:r>
-              <a:rPr sz="1550" b="0" i="0">
-                <a:solidFill>
-                  <a:srgbClr val="212A26"/>
-                </a:solidFill>
-                <a:latin typeface="Calibri"/>
-              </a:rPr>
-              <a:t>The last-thing check (subject · recipients · attachment) prevents what perfect prose cannot.</a:t>
-            </a:r>
-          </a:p>
-        </p:txBody>
-      </p:sp>
-      <p:sp>
-        <p:nvSpPr>
-          <p:cNvPr id="17" name="Rounded Rectangle 16" descr="Practice reminder"/>
-          <p:cNvSpPr/>
-          <p:nvPr/>
-        </p:nvSpPr>
-        <p:spPr>
-          <a:xfrm>
-            <a:off x="548640" y="5468112"/>
-            <a:ext cx="10424160" cy="685800"/>
-          </a:xfrm>
-          <a:prstGeom prst="roundRect">
-            <a:avLst/>
-          </a:prstGeom>
-          <a:solidFill>
-            <a:srgbClr val="0E4D33"/>
-          </a:solidFill>
-          <a:ln>
-            <a:noFill/>
-          </a:ln>
-          <a:effectLst/>
-        </p:spPr>
-        <p:style>
-          <a:lnRef idx="1">
-            <a:schemeClr val="accent1"/>
-          </a:lnRef>
-          <a:fillRef idx="3">
-            <a:schemeClr val="accent1"/>
-          </a:fillRef>
-          <a:effectRef idx="2">
-            <a:schemeClr val="accent1"/>
-          </a:effectRef>
-          <a:fontRef idx="minor">
-            <a:schemeClr val="lt1"/>
-          </a:fontRef>
-        </p:style>
-        <p:txBody>
-          <a:bodyPr rtlCol="0" anchor="t" wrap="square" lIns="164592" rIns="164592" tIns="128016" bIns="109728"/>
-          <a:lstStyle/>
-          <a:p>
-            <a:pPr algn="l">
-              <a:spcAft>
-                <a:spcPts val="0"/>
-              </a:spcAft>
-            </a:pPr>
-            <a:r>
-              <a:rPr sz="1450" b="1" i="0">
-                <a:solidFill>
-                  <a:srgbClr val="FFFFFF"/>
-                </a:solidFill>
-                <a:latin typeface="Calibri"/>
-              </a:rPr>
-              <a:t>Practice now: course site → Chapter 4 → Practice, then the graded homework before the weekly deadline.</a:t>
+            <a:pPr algn="r"/>
+            <a:r>
+              <a:rPr sz="1000">
+                <a:solidFill>
+                  <a:srgbClr val="5E6B64"/>
+                </a:solidFill>
+                <a:latin typeface="Calibri"/>
+              </a:rPr>
+              <a:t>19</a:t>
             </a:r>
           </a:p>
         </p:txBody>
@@ -9615,7 +9723,7 @@
     <p:bg>
       <p:bgPr>
         <a:solidFill>
-          <a:srgbClr val="EAF1EB"/>
+          <a:srgbClr val="FFFFFF"/>
         </a:solidFill>
         <a:effectLst/>
       </p:bgPr>
@@ -9629,7 +9737,7 @@
       <p:grpSpPr/>
       <p:sp>
         <p:nvSpPr>
-          <p:cNvPr id="2" name="Title 1" descr="Slide title: Worth keeping"/>
+          <p:cNvPr id="2" name="Title 1" descr="Slide title: Tone: the pass most writers never run"/>
           <p:cNvSpPr>
             <a:spLocks noGrp="1"/>
           </p:cNvSpPr>
@@ -9649,27 +9757,27 @@
           <a:p>
             <a:pPr algn="l"/>
             <a:r>
-              <a:rPr sz="3400" b="1">
+              <a:rPr sz="3200" b="1">
                 <a:solidFill>
                   <a:srgbClr val="0E4D33"/>
                 </a:solidFill>
                 <a:latin typeface="Cambria"/>
               </a:rPr>
-              <a:t>Worth keeping</a:t>
-            </a:r>
-          </a:p>
-        </p:txBody>
-      </p:sp>
-      <p:sp>
-        <p:nvSpPr>
-          <p:cNvPr id="3" name="TextBox 2" descr="Quotation"/>
+              <a:t>Tone: the pass most writers never run</a:t>
+            </a:r>
+          </a:p>
+        </p:txBody>
+      </p:sp>
+      <p:sp>
+        <p:nvSpPr>
+          <p:cNvPr id="3" name="TextBox 2" descr="Footer: BADM 225 · Chapter 4"/>
           <p:cNvSpPr txBox="1"/>
           <p:nvPr/>
         </p:nvSpPr>
         <p:spPr>
           <a:xfrm>
-            <a:off x="1280160" y="2194560"/>
-            <a:ext cx="9601200" cy="2377440"/>
+            <a:off x="502920" y="6446520"/>
+            <a:ext cx="5486400" cy="320040"/>
           </a:xfrm>
           <a:prstGeom prst="rect">
             <a:avLst/>
@@ -9677,38 +9785,33 @@
           <a:noFill/>
         </p:spPr>
         <p:txBody>
-          <a:bodyPr wrap="square">
+          <a:bodyPr wrap="none">
             <a:spAutoFit/>
           </a:bodyPr>
           <a:lstStyle/>
           <a:p>
-            <a:pPr algn="l">
-              <a:spcAft>
-                <a:spcPts val="800"/>
-              </a:spcAft>
-            </a:pPr>
-            <a:r>
-              <a:rPr sz="2700" b="0" i="1">
-                <a:solidFill>
-                  <a:srgbClr val="212A26"/>
-                </a:solidFill>
-                <a:latin typeface="Cambria"/>
-              </a:rPr>
-              <a:t>“Errors are the one writing flaw every reader can see. Revision is how professionals make sure the flaw they show the world is never that one.”</a:t>
-            </a:r>
-          </a:p>
-        </p:txBody>
-      </p:sp>
-      <p:sp>
-        <p:nvSpPr>
-          <p:cNvPr id="4" name="TextBox 3" descr="Attribution"/>
+            <a:r>
+              <a:rPr sz="1000">
+                <a:solidFill>
+                  <a:srgbClr val="5E6B64"/>
+                </a:solidFill>
+                <a:latin typeface="Calibri"/>
+              </a:rPr>
+              <a:t>BADM 225 · Chapter 4</a:t>
+            </a:r>
+          </a:p>
+        </p:txBody>
+      </p:sp>
+      <p:sp>
+        <p:nvSpPr>
+          <p:cNvPr id="4" name="TextBox 3" descr="Slide number 20"/>
           <p:cNvSpPr txBox="1"/>
           <p:nvPr/>
         </p:nvSpPr>
         <p:spPr>
           <a:xfrm>
-            <a:off x="1280160" y="4754880"/>
-            <a:ext cx="9601200" cy="548640"/>
+            <a:off x="11247120" y="6446520"/>
+            <a:ext cx="640080" cy="320040"/>
           </a:xfrm>
           <a:prstGeom prst="rect">
             <a:avLst/>
@@ -9716,38 +9819,34 @@
           <a:noFill/>
         </p:spPr>
         <p:txBody>
-          <a:bodyPr wrap="square">
+          <a:bodyPr wrap="none">
             <a:spAutoFit/>
           </a:bodyPr>
           <a:lstStyle/>
           <a:p>
-            <a:pPr algn="l">
-              <a:spcAft>
-                <a:spcPts val="800"/>
-              </a:spcAft>
-            </a:pPr>
-            <a:r>
-              <a:rPr sz="1600" b="0" i="0">
+            <a:pPr algn="r"/>
+            <a:r>
+              <a:rPr sz="1000">
                 <a:solidFill>
                   <a:srgbClr val="5E6B64"/>
                 </a:solidFill>
                 <a:latin typeface="Calibri"/>
               </a:rPr>
-              <a:t>— this chapter, compressed</a:t>
-            </a:r>
-          </a:p>
-        </p:txBody>
-      </p:sp>
-      <p:sp>
-        <p:nvSpPr>
-          <p:cNvPr id="5" name="TextBox 4" descr="Footer: BADM 225 · Chapter 4"/>
+              <a:t>20</a:t>
+            </a:r>
+          </a:p>
+        </p:txBody>
+      </p:sp>
+      <p:sp>
+        <p:nvSpPr>
+          <p:cNvPr id="5" name="TextBox 4" descr="Key points"/>
           <p:cNvSpPr txBox="1"/>
           <p:nvPr/>
         </p:nvSpPr>
         <p:spPr>
           <a:xfrm>
-            <a:off x="502920" y="6446520"/>
-            <a:ext cx="5486400" cy="320040"/>
+            <a:off x="548640" y="1554480"/>
+            <a:ext cx="11064240" cy="4663440"/>
           </a:xfrm>
           <a:prstGeom prst="rect">
             <a:avLst/>
@@ -9755,54 +9854,178 @@
           <a:noFill/>
         </p:spPr>
         <p:txBody>
-          <a:bodyPr wrap="none">
+          <a:bodyPr wrap="square">
             <a:spAutoFit/>
           </a:bodyPr>
           <a:lstStyle/>
           <a:p>
-            <a:r>
-              <a:rPr sz="1000">
-                <a:solidFill>
-                  <a:srgbClr val="5E6B64"/>
-                </a:solidFill>
-                <a:latin typeface="Calibri"/>
-              </a:rPr>
-              <a:t>BADM 225 · Chapter 4</a:t>
-            </a:r>
-          </a:p>
-        </p:txBody>
-      </p:sp>
-      <p:sp>
-        <p:nvSpPr>
-          <p:cNvPr id="6" name="TextBox 5" descr="Slide number 20"/>
-          <p:cNvSpPr txBox="1"/>
-          <p:nvPr/>
-        </p:nvSpPr>
-        <p:spPr>
-          <a:xfrm>
-            <a:off x="11247120" y="6446520"/>
-            <a:ext cx="640080" cy="320040"/>
-          </a:xfrm>
-          <a:prstGeom prst="rect">
-            <a:avLst/>
-          </a:prstGeom>
-          <a:noFill/>
-        </p:spPr>
-        <p:txBody>
-          <a:bodyPr wrap="none">
-            <a:spAutoFit/>
-          </a:bodyPr>
-          <a:lstStyle/>
-          <a:p>
-            <a:pPr algn="r"/>
-            <a:r>
-              <a:rPr sz="1000">
-                <a:solidFill>
-                  <a:srgbClr val="5E6B64"/>
-                </a:solidFill>
-                <a:latin typeface="Calibri"/>
-              </a:rPr>
-              <a:t>20</a:t>
+            <a:pPr algn="l">
+              <a:spcAft>
+                <a:spcPts val="1200"/>
+              </a:spcAft>
+            </a:pPr>
+            <a:r>
+              <a:rPr sz="1700">
+                <a:solidFill>
+                  <a:srgbClr val="8A6410"/>
+                </a:solidFill>
+                <a:latin typeface="Calibri"/>
+              </a:rPr>
+              <a:t>▪  </a:t>
+            </a:r>
+            <a:r>
+              <a:rPr sz="1700" b="1">
+                <a:solidFill>
+                  <a:srgbClr val="0E4D33"/>
+                </a:solidFill>
+                <a:latin typeface="Calibri"/>
+              </a:rPr>
+              <a:t>Read it as the recipient.  </a:t>
+            </a:r>
+            <a:r>
+              <a:rPr sz="1700" b="0" i="0">
+                <a:solidFill>
+                  <a:srgbClr val="212A26"/>
+                </a:solidFill>
+                <a:latin typeface="Calibri"/>
+              </a:rPr>
+              <a:t>Not 'is this what I meant?' but 'how does this feel arriving in MY inbox on a bad day?'</a:t>
+            </a:r>
+          </a:p>
+          <a:p>
+            <a:pPr algn="l">
+              <a:spcAft>
+                <a:spcPts val="1200"/>
+              </a:spcAft>
+            </a:pPr>
+            <a:r>
+              <a:rPr sz="1700">
+                <a:solidFill>
+                  <a:srgbClr val="8A6410"/>
+                </a:solidFill>
+                <a:latin typeface="Calibri"/>
+              </a:rPr>
+              <a:t>▪  </a:t>
+            </a:r>
+            <a:r>
+              <a:rPr sz="1700" b="1">
+                <a:solidFill>
+                  <a:srgbClr val="0E4D33"/>
+                </a:solidFill>
+                <a:latin typeface="Calibri"/>
+              </a:rPr>
+              <a:t>Hunt the accidental accusations.  </a:t>
+            </a:r>
+            <a:r>
+              <a:rPr sz="1700" b="0" i="0">
+                <a:solidFill>
+                  <a:srgbClr val="212A26"/>
+                </a:solidFill>
+                <a:latin typeface="Calibri"/>
+              </a:rPr>
+              <a:t>'You failed to include the form' → 'The form wasn't attached — could you resend it?' Same fact, no finger.</a:t>
+            </a:r>
+          </a:p>
+          <a:p>
+            <a:pPr algn="l">
+              <a:spcAft>
+                <a:spcPts val="1200"/>
+              </a:spcAft>
+            </a:pPr>
+            <a:r>
+              <a:rPr sz="1700">
+                <a:solidFill>
+                  <a:srgbClr val="8A6410"/>
+                </a:solidFill>
+                <a:latin typeface="Calibri"/>
+              </a:rPr>
+              <a:t>▪  </a:t>
+            </a:r>
+            <a:r>
+              <a:rPr sz="1700" b="1">
+                <a:solidFill>
+                  <a:srgbClr val="0E4D33"/>
+                </a:solidFill>
+                <a:latin typeface="Calibri"/>
+              </a:rPr>
+              <a:t>Check the temperature of imperatives.  </a:t>
+            </a:r>
+            <a:r>
+              <a:rPr sz="1700" b="0" i="0">
+                <a:solidFill>
+                  <a:srgbClr val="212A26"/>
+                </a:solidFill>
+                <a:latin typeface="Calibri"/>
+              </a:rPr>
+              <a:t>'Send me the report' reads colder in text than it sounded in your head. Please is free.</a:t>
+            </a:r>
+          </a:p>
+          <a:p>
+            <a:pPr algn="l">
+              <a:spcAft>
+                <a:spcPts val="1200"/>
+              </a:spcAft>
+            </a:pPr>
+            <a:r>
+              <a:rPr sz="1700">
+                <a:solidFill>
+                  <a:srgbClr val="8A6410"/>
+                </a:solidFill>
+                <a:latin typeface="Calibri"/>
+              </a:rPr>
+              <a:t>▪  </a:t>
+            </a:r>
+            <a:r>
+              <a:rPr sz="1700" b="1">
+                <a:solidFill>
+                  <a:srgbClr val="0E4D33"/>
+                </a:solidFill>
+                <a:latin typeface="Calibri"/>
+              </a:rPr>
+              <a:t>Confidence without arrogance.  </a:t>
+            </a:r>
+            <a:r>
+              <a:rPr sz="1700" b="0" i="0">
+                <a:solidFill>
+                  <a:srgbClr val="212A26"/>
+                </a:solidFill>
+                <a:latin typeface="Calibri"/>
+              </a:rPr>
+              <a:t>'I believe this might possibly work' undersells; 'obviously this is the answer' overplays. State it plainly and stand behind it.</a:t>
+            </a:r>
+          </a:p>
+          <a:p>
+            <a:pPr algn="l">
+              <a:spcAft>
+                <a:spcPts val="1200"/>
+              </a:spcAft>
+            </a:pPr>
+            <a:r>
+              <a:rPr sz="1700">
+                <a:solidFill>
+                  <a:srgbClr val="8A6410"/>
+                </a:solidFill>
+                <a:latin typeface="Calibri"/>
+              </a:rPr>
+              <a:t>▪  </a:t>
+            </a:r>
+            <a:r>
+              <a:rPr sz="1700" b="1">
+                <a:solidFill>
+                  <a:srgbClr val="0E4D33"/>
+                </a:solidFill>
+                <a:latin typeface="Calibri"/>
+              </a:rPr>
+              <a:t>The forward test.  </a:t>
+            </a:r>
+            <a:r>
+              <a:rPr sz="1700" b="0" i="0">
+                <a:solidFill>
+                  <a:srgbClr val="212A26"/>
+                </a:solidFill>
+                <a:latin typeface="Calibri"/>
+              </a:rPr>
+              <a:t>Would this sentence embarrass you if forwarded to the person it's about? Then it's not done.</a:t>
             </a:r>
           </a:p>
         </p:txBody>
@@ -9821,7 +10044,7 @@
     <p:bg>
       <p:bgPr>
         <a:solidFill>
-          <a:srgbClr val="0E4D33"/>
+          <a:srgbClr val="FFFFFF"/>
         </a:solidFill>
         <a:effectLst/>
       </p:bgPr>
@@ -9835,7 +10058,7 @@
       <p:grpSpPr/>
       <p:sp>
         <p:nvSpPr>
-          <p:cNvPr id="2" name="Title 1" descr="Slide title: Discussion questions"/>
+          <p:cNvPr id="2" name="Title 1" descr="Slide title: Bias-free language: precision, not politics"/>
           <p:cNvSpPr>
             <a:spLocks noGrp="1"/>
           </p:cNvSpPr>
@@ -9855,27 +10078,27 @@
           <a:p>
             <a:pPr algn="l"/>
             <a:r>
-              <a:rPr sz="3400" b="1">
-                <a:solidFill>
-                  <a:srgbClr val="FFFFFF"/>
+              <a:rPr sz="3200" b="1">
+                <a:solidFill>
+                  <a:srgbClr val="0E4D33"/>
                 </a:solidFill>
                 <a:latin typeface="Cambria"/>
               </a:rPr>
-              <a:t>Discussion questions</a:t>
-            </a:r>
-          </a:p>
-        </p:txBody>
-      </p:sp>
-      <p:sp>
-        <p:nvSpPr>
-          <p:cNvPr id="3" name="TextBox 2" descr="Discussion questions"/>
+              <a:t>Bias-free language: precision, not politics</a:t>
+            </a:r>
+          </a:p>
+        </p:txBody>
+      </p:sp>
+      <p:sp>
+        <p:nvSpPr>
+          <p:cNvPr id="3" name="TextBox 2" descr="Footer: BADM 225 · Chapter 4"/>
           <p:cNvSpPr txBox="1"/>
           <p:nvPr/>
         </p:nvSpPr>
         <p:spPr>
           <a:xfrm>
-            <a:off x="731520" y="1737360"/>
-            <a:ext cx="10698480" cy="4480560"/>
+            <a:off x="502920" y="6446520"/>
+            <a:ext cx="5486400" cy="320040"/>
           </a:xfrm>
           <a:prstGeom prst="rect">
             <a:avLst/>
@@ -9883,147 +10106,33 @@
           <a:noFill/>
         </p:spPr>
         <p:txBody>
-          <a:bodyPr wrap="square">
+          <a:bodyPr wrap="none">
             <a:spAutoFit/>
           </a:bodyPr>
           <a:lstStyle/>
           <a:p>
-            <a:pPr algn="l">
-              <a:spcAft>
-                <a:spcPts val="1800"/>
-              </a:spcAft>
-            </a:pPr>
-            <a:r>
-              <a:rPr sz="1800" b="1">
-                <a:solidFill>
-                  <a:srgbClr val="C9931A"/>
-                </a:solidFill>
-                <a:latin typeface="Calibri"/>
-              </a:rPr>
-              <a:t>1.  </a:t>
-            </a:r>
-            <a:r>
-              <a:rPr sz="1800" b="0" i="0">
-                <a:solidFill>
-                  <a:srgbClr val="FFFFFF"/>
-                </a:solidFill>
-                <a:latin typeface="Calibri"/>
-              </a:rPr>
-              <a:t>Which flab target is your signature? Bring three examples from your own writing, repaired.</a:t>
-            </a:r>
-          </a:p>
-          <a:p>
-            <a:pPr algn="l">
-              <a:spcAft>
-                <a:spcPts val="1800"/>
-              </a:spcAft>
-            </a:pPr>
-            <a:r>
-              <a:rPr sz="1800" b="1">
-                <a:solidFill>
-                  <a:srgbClr val="C9931A"/>
-                </a:solidFill>
-                <a:latin typeface="Calibri"/>
-              </a:rPr>
-              <a:t>2.  </a:t>
-            </a:r>
-            <a:r>
-              <a:rPr sz="1800" b="0" i="0">
-                <a:solidFill>
-                  <a:srgbClr val="FFFFFF"/>
-                </a:solidFill>
-                <a:latin typeface="Calibri"/>
-              </a:rPr>
-              <a:t>Where can a cooling period realistically live in your workflow — and for which documents is it non-negotiable?</a:t>
-            </a:r>
-          </a:p>
-          <a:p>
-            <a:pPr algn="l">
-              <a:spcAft>
-                <a:spcPts val="1800"/>
-              </a:spcAft>
-            </a:pPr>
-            <a:r>
-              <a:rPr sz="1800" b="1">
-                <a:solidFill>
-                  <a:srgbClr val="C9931A"/>
-                </a:solidFill>
-                <a:latin typeface="Calibri"/>
-              </a:rPr>
-              <a:t>3.  </a:t>
-            </a:r>
-            <a:r>
-              <a:rPr sz="1800" b="0" i="0">
-                <a:solidFill>
-                  <a:srgbClr val="FFFFFF"/>
-                </a:solidFill>
-                <a:latin typeface="Calibri"/>
-              </a:rPr>
-              <a:t>Find a public sentence whose ambiguity could cost money. Rewrite it so no second reading exists.</a:t>
-            </a:r>
-          </a:p>
-          <a:p>
-            <a:pPr algn="l">
-              <a:spcAft>
-                <a:spcPts val="1800"/>
-              </a:spcAft>
-            </a:pPr>
-            <a:r>
-              <a:rPr sz="1800" b="1">
-                <a:solidFill>
-                  <a:srgbClr val="C9931A"/>
-                </a:solidFill>
-                <a:latin typeface="Calibri"/>
-              </a:rPr>
-              <a:t>4.  </a:t>
-            </a:r>
-            <a:r>
-              <a:rPr sz="1800" b="0" i="0">
-                <a:solidFill>
-                  <a:srgbClr val="FFFFFF"/>
-                </a:solidFill>
-                <a:latin typeface="Calibri"/>
-              </a:rPr>
-              <a:t>Automated tools pass all ten workshop sentences. What does that say about you versus your tools?</a:t>
-            </a:r>
-          </a:p>
-          <a:p>
-            <a:pPr algn="l">
-              <a:spcAft>
-                <a:spcPts val="1800"/>
-              </a:spcAft>
-            </a:pPr>
-            <a:r>
-              <a:rPr sz="1800" b="1">
-                <a:solidFill>
-                  <a:srgbClr val="C9931A"/>
-                </a:solidFill>
-                <a:latin typeface="Calibri"/>
-              </a:rPr>
-              <a:t>5.  </a:t>
-            </a:r>
-            <a:r>
-              <a:rPr sz="1800" b="0" i="0">
-                <a:solidFill>
-                  <a:srgbClr val="FFFFFF"/>
-                </a:solidFill>
-                <a:latin typeface="Calibri"/>
-              </a:rPr>
-              <a:t>Defend or attack: the serial comma should be mandatory in business writing.</a:t>
-            </a:r>
-          </a:p>
-        </p:txBody>
-      </p:sp>
-      <p:sp>
-        <p:nvSpPr>
-          <p:cNvPr id="4" name="TextBox 3" descr="Footer"/>
+            <a:r>
+              <a:rPr sz="1000">
+                <a:solidFill>
+                  <a:srgbClr val="5E6B64"/>
+                </a:solidFill>
+                <a:latin typeface="Calibri"/>
+              </a:rPr>
+              <a:t>BADM 225 · Chapter 4</a:t>
+            </a:r>
+          </a:p>
+        </p:txBody>
+      </p:sp>
+      <p:sp>
+        <p:nvSpPr>
+          <p:cNvPr id="4" name="TextBox 3" descr="Slide number 21"/>
           <p:cNvSpPr txBox="1"/>
           <p:nvPr/>
         </p:nvSpPr>
         <p:spPr>
           <a:xfrm>
-            <a:off x="502920" y="6446520"/>
-            <a:ext cx="5486400" cy="320040"/>
+            <a:off x="11247120" y="6446520"/>
+            <a:ext cx="640080" cy="320040"/>
           </a:xfrm>
           <a:prstGeom prst="rect">
             <a:avLst/>
@@ -10036,14 +10145,329 @@
           </a:bodyPr>
           <a:lstStyle/>
           <a:p>
+            <a:pPr algn="r"/>
             <a:r>
               <a:rPr sz="1000">
                 <a:solidFill>
-                  <a:srgbClr val="A8C4B2"/>
-                </a:solidFill>
-                <a:latin typeface="Calibri"/>
-              </a:rPr>
-              <a:t>BADM 225 · Chapter 4</a:t>
+                  <a:srgbClr val="5E6B64"/>
+                </a:solidFill>
+                <a:latin typeface="Calibri"/>
+              </a:rPr>
+              <a:t>21</a:t>
+            </a:r>
+          </a:p>
+        </p:txBody>
+      </p:sp>
+      <p:sp>
+        <p:nvSpPr>
+          <p:cNvPr id="5" name="Rounded Rectangle 4" descr="The patterns to catch panel"/>
+          <p:cNvSpPr/>
+          <p:nvPr/>
+        </p:nvSpPr>
+        <p:spPr>
+          <a:xfrm>
+            <a:off x="548640" y="1554480"/>
+            <a:ext cx="5394960" cy="4572000"/>
+          </a:xfrm>
+          <a:prstGeom prst="roundRect">
+            <a:avLst/>
+          </a:prstGeom>
+          <a:solidFill>
+            <a:srgbClr val="EAF1EB"/>
+          </a:solidFill>
+          <a:ln>
+            <a:noFill/>
+          </a:ln>
+          <a:effectLst/>
+        </p:spPr>
+        <p:style>
+          <a:lnRef idx="1">
+            <a:schemeClr val="accent1"/>
+          </a:lnRef>
+          <a:fillRef idx="3">
+            <a:schemeClr val="accent1"/>
+          </a:fillRef>
+          <a:effectRef idx="2">
+            <a:schemeClr val="accent1"/>
+          </a:effectRef>
+          <a:fontRef idx="minor">
+            <a:schemeClr val="lt1"/>
+          </a:fontRef>
+        </p:style>
+        <p:txBody>
+          <a:bodyPr rtlCol="0" anchor="t" wrap="square" lIns="164592" rIns="164592" tIns="128016" bIns="109728"/>
+          <a:lstStyle/>
+          <a:p>
+            <a:pPr algn="l">
+              <a:spcAft>
+                <a:spcPts val="1200"/>
+              </a:spcAft>
+            </a:pPr>
+            <a:r>
+              <a:rPr sz="1800" b="1" i="0">
+                <a:solidFill>
+                  <a:srgbClr val="0E4D33"/>
+                </a:solidFill>
+                <a:latin typeface="Cambria"/>
+              </a:rPr>
+              <a:t>The patterns to catch</a:t>
+            </a:r>
+          </a:p>
+          <a:p>
+            <a:pPr algn="l">
+              <a:spcAft>
+                <a:spcPts val="900"/>
+              </a:spcAft>
+            </a:pPr>
+            <a:r>
+              <a:rPr sz="1500">
+                <a:solidFill>
+                  <a:srgbClr val="8A6410"/>
+                </a:solidFill>
+                <a:latin typeface="Calibri"/>
+              </a:rPr>
+              <a:t>▪  </a:t>
+            </a:r>
+            <a:r>
+              <a:rPr sz="1500" b="0" i="0">
+                <a:solidFill>
+                  <a:srgbClr val="212A26"/>
+                </a:solidFill>
+                <a:latin typeface="Calibri"/>
+              </a:rPr>
+              <a:t>Gendered job titles: chairman, salesman, manpower</a:t>
+            </a:r>
+          </a:p>
+          <a:p>
+            <a:pPr algn="l">
+              <a:spcAft>
+                <a:spcPts val="900"/>
+              </a:spcAft>
+            </a:pPr>
+            <a:r>
+              <a:rPr sz="1500">
+                <a:solidFill>
+                  <a:srgbClr val="8A6410"/>
+                </a:solidFill>
+                <a:latin typeface="Calibri"/>
+              </a:rPr>
+              <a:t>▪  </a:t>
+            </a:r>
+            <a:r>
+              <a:rPr sz="1500" b="0" i="0">
+                <a:solidFill>
+                  <a:srgbClr val="212A26"/>
+                </a:solidFill>
+                <a:latin typeface="Calibri"/>
+              </a:rPr>
+              <a:t>Unnecessary demographic tags: 'the female engineer'</a:t>
+            </a:r>
+          </a:p>
+          <a:p>
+            <a:pPr algn="l">
+              <a:spcAft>
+                <a:spcPts val="900"/>
+              </a:spcAft>
+            </a:pPr>
+            <a:r>
+              <a:rPr sz="1500">
+                <a:solidFill>
+                  <a:srgbClr val="8A6410"/>
+                </a:solidFill>
+                <a:latin typeface="Calibri"/>
+              </a:rPr>
+              <a:t>▪  </a:t>
+            </a:r>
+            <a:r>
+              <a:rPr sz="1500" b="0" i="0">
+                <a:solidFill>
+                  <a:srgbClr val="212A26"/>
+                </a:solidFill>
+                <a:latin typeface="Calibri"/>
+              </a:rPr>
+              <a:t>Age assumptions: 'young and energetic team'</a:t>
+            </a:r>
+          </a:p>
+          <a:p>
+            <a:pPr algn="l">
+              <a:spcAft>
+                <a:spcPts val="900"/>
+              </a:spcAft>
+            </a:pPr>
+            <a:r>
+              <a:rPr sz="1500">
+                <a:solidFill>
+                  <a:srgbClr val="8A6410"/>
+                </a:solidFill>
+                <a:latin typeface="Calibri"/>
+              </a:rPr>
+              <a:t>▪  </a:t>
+            </a:r>
+            <a:r>
+              <a:rPr sz="1500" b="0" i="0">
+                <a:solidFill>
+                  <a:srgbClr val="212A26"/>
+                </a:solidFill>
+                <a:latin typeface="Calibri"/>
+              </a:rPr>
+              <a:t>Disability phrasing that leads with the condition</a:t>
+            </a:r>
+          </a:p>
+        </p:txBody>
+      </p:sp>
+      <p:sp>
+        <p:nvSpPr>
+          <p:cNvPr id="6" name="Rounded Rectangle 5" descr="The repairs panel"/>
+          <p:cNvSpPr/>
+          <p:nvPr/>
+        </p:nvSpPr>
+        <p:spPr>
+          <a:xfrm>
+            <a:off x="6263640" y="1554480"/>
+            <a:ext cx="5394960" cy="4572000"/>
+          </a:xfrm>
+          <a:prstGeom prst="roundRect">
+            <a:avLst/>
+          </a:prstGeom>
+          <a:solidFill>
+            <a:srgbClr val="EAF1EB"/>
+          </a:solidFill>
+          <a:ln>
+            <a:noFill/>
+          </a:ln>
+          <a:effectLst/>
+        </p:spPr>
+        <p:style>
+          <a:lnRef idx="1">
+            <a:schemeClr val="accent1"/>
+          </a:lnRef>
+          <a:fillRef idx="3">
+            <a:schemeClr val="accent1"/>
+          </a:fillRef>
+          <a:effectRef idx="2">
+            <a:schemeClr val="accent1"/>
+          </a:effectRef>
+          <a:fontRef idx="minor">
+            <a:schemeClr val="lt1"/>
+          </a:fontRef>
+        </p:style>
+        <p:txBody>
+          <a:bodyPr rtlCol="0" anchor="t" wrap="square" lIns="164592" rIns="164592" tIns="128016" bIns="109728"/>
+          <a:lstStyle/>
+          <a:p>
+            <a:pPr algn="l">
+              <a:spcAft>
+                <a:spcPts val="1200"/>
+              </a:spcAft>
+            </a:pPr>
+            <a:r>
+              <a:rPr sz="1800" b="1" i="0">
+                <a:solidFill>
+                  <a:srgbClr val="0E4D33"/>
+                </a:solidFill>
+                <a:latin typeface="Cambria"/>
+              </a:rPr>
+              <a:t>The repairs</a:t>
+            </a:r>
+          </a:p>
+          <a:p>
+            <a:pPr algn="l">
+              <a:spcAft>
+                <a:spcPts val="900"/>
+              </a:spcAft>
+            </a:pPr>
+            <a:r>
+              <a:rPr sz="1500">
+                <a:solidFill>
+                  <a:srgbClr val="8A6410"/>
+                </a:solidFill>
+                <a:latin typeface="Calibri"/>
+              </a:rPr>
+              <a:t>▪  </a:t>
+            </a:r>
+            <a:r>
+              <a:rPr sz="1500" b="0" i="0">
+                <a:solidFill>
+                  <a:srgbClr val="212A26"/>
+                </a:solidFill>
+                <a:latin typeface="Calibri"/>
+              </a:rPr>
+              <a:t>Chair, sales rep, staffing — the neutral term is usually shorter</a:t>
+            </a:r>
+          </a:p>
+          <a:p>
+            <a:pPr algn="l">
+              <a:spcAft>
+                <a:spcPts val="900"/>
+              </a:spcAft>
+            </a:pPr>
+            <a:r>
+              <a:rPr sz="1500">
+                <a:solidFill>
+                  <a:srgbClr val="8A6410"/>
+                </a:solidFill>
+                <a:latin typeface="Calibri"/>
+              </a:rPr>
+              <a:t>▪  </a:t>
+            </a:r>
+            <a:r>
+              <a:rPr sz="1500" b="0" i="0">
+                <a:solidFill>
+                  <a:srgbClr val="212A26"/>
+                </a:solidFill>
+                <a:latin typeface="Calibri"/>
+              </a:rPr>
+              <a:t>Mention demographics only when relevant to the point</a:t>
+            </a:r>
+          </a:p>
+          <a:p>
+            <a:pPr algn="l">
+              <a:spcAft>
+                <a:spcPts val="900"/>
+              </a:spcAft>
+            </a:pPr>
+            <a:r>
+              <a:rPr sz="1500">
+                <a:solidFill>
+                  <a:srgbClr val="8A6410"/>
+                </a:solidFill>
+                <a:latin typeface="Calibri"/>
+              </a:rPr>
+              <a:t>▪  </a:t>
+            </a:r>
+            <a:r>
+              <a:rPr sz="1500" b="0" i="0">
+                <a:solidFill>
+                  <a:srgbClr val="212A26"/>
+                </a:solidFill>
+                <a:latin typeface="Calibri"/>
+              </a:rPr>
+              <a:t>Describe the behavior, not the birth year</a:t>
+            </a:r>
+          </a:p>
+          <a:p>
+            <a:pPr algn="l">
+              <a:spcAft>
+                <a:spcPts val="900"/>
+              </a:spcAft>
+            </a:pPr>
+            <a:r>
+              <a:rPr sz="1500">
+                <a:solidFill>
+                  <a:srgbClr val="8A6410"/>
+                </a:solidFill>
+                <a:latin typeface="Calibri"/>
+              </a:rPr>
+              <a:t>▪  </a:t>
+            </a:r>
+            <a:r>
+              <a:rPr sz="1500" b="0" i="0">
+                <a:solidFill>
+                  <a:srgbClr val="212A26"/>
+                </a:solidFill>
+                <a:latin typeface="Calibri"/>
+              </a:rPr>
+              <a:t>Person-first or identity-first per the person's own preference; when unknown, person-first</a:t>
             </a:r>
           </a:p>
         </p:txBody>
@@ -10076,7 +10500,7 @@
       <p:grpSpPr/>
       <p:sp>
         <p:nvSpPr>
-          <p:cNvPr id="2" name="Title 1" descr="Slide title: Your next steps"/>
+          <p:cNvPr id="2" name="Title 1" descr="Slide title: Reviewing someone else's draft"/>
           <p:cNvSpPr>
             <a:spLocks noGrp="1"/>
           </p:cNvSpPr>
@@ -10102,7 +10526,7 @@
                 </a:solidFill>
                 <a:latin typeface="Cambria"/>
               </a:rPr>
-              <a:t>Your next steps</a:t>
+              <a:t>Reviewing someone else's draft</a:t>
             </a:r>
           </a:p>
         </p:txBody>
@@ -10219,7 +10643,7 @@
                 </a:solidFill>
                 <a:latin typeface="Calibri"/>
               </a:rPr>
-              <a:t>Practice:  </a:t>
+              <a:t>Comment on the work, never the writer.  </a:t>
             </a:r>
             <a:r>
               <a:rPr sz="1700" b="0" i="0">
@@ -10228,7 +10652,7 @@
                 </a:solidFill>
                 <a:latin typeface="Calibri"/>
               </a:rPr>
-              <a:t>Course site → Chapter 4 → Practice questions (instant feedback, unlimited tries).</a:t>
+              <a:t>'This paragraph buries the request' — not 'you always bury your requests.'</a:t>
             </a:r>
           </a:p>
           <a:p>
@@ -10253,7 +10677,7 @@
                 </a:solidFill>
                 <a:latin typeface="Calibri"/>
               </a:rPr>
-              <a:t>Graded:  </a:t>
+              <a:t>Triage your comments.  </a:t>
             </a:r>
             <a:r>
               <a:rPr sz="1700" b="0" i="0">
@@ -10262,7 +10686,7 @@
                 </a:solidFill>
                 <a:latin typeface="Calibri"/>
               </a:rPr>
-              <a:t>Complete the Chapter 4 homework on the site; paste your completion code into the Blackboard assignment before the weekly deadline.</a:t>
+              <a:t>One structural issue outweighs nine comma notes. Lead with what matters; don't drown the writer in trivia.</a:t>
             </a:r>
           </a:p>
           <a:p>
@@ -10287,7 +10711,7 @@
                 </a:solidFill>
                 <a:latin typeface="Calibri"/>
               </a:rPr>
-              <a:t>Read:  </a:t>
+              <a:t>Suggest, don't seize.  </a:t>
             </a:r>
             <a:r>
               <a:rPr sz="1700" b="0" i="0">
@@ -10296,7 +10720,7 @@
                 </a:solidFill>
                 <a:latin typeface="Calibri"/>
               </a:rPr>
-              <a:t>The Chapter 4 Study Guide — the ten-repair workshop and the full Oakhurst analysis.</a:t>
+              <a:t>Rewriting their document in your voice teaches nothing and breeds resentment. Mark the problem; let them solve it.</a:t>
             </a:r>
           </a:p>
           <a:p>
@@ -10321,7 +10745,7 @@
                 </a:solidFill>
                 <a:latin typeface="Calibri"/>
               </a:rPr>
-              <a:t>Do:  </a:t>
+              <a:t>Say what works.  </a:t>
             </a:r>
             <a:r>
               <a:rPr sz="1700" b="0" i="0">
@@ -10330,9 +10754,160 @@
                 </a:solidFill>
                 <a:latin typeface="Calibri"/>
               </a:rPr>
-              <a:t>Build your five-item pre-send checklist and use it on everything with stakes this week.</a:t>
-            </a:r>
-          </a:p>
+              <a:t>'Keep this opening — it's exactly right' is information too. All-negative reviews get ignored as noise.</a:t>
+            </a:r>
+          </a:p>
+        </p:txBody>
+      </p:sp>
+    </p:spTree>
+  </p:cSld>
+  <p:clrMapOvr>
+    <a:masterClrMapping/>
+  </p:clrMapOvr>
+</p:sld>
+</file>
+
+<file path=ppt/slides/slide23.xml><?xml version="1.0" encoding="utf-8"?>
+<p:sld xmlns:a="http://schemas.openxmlformats.org/drawingml/2006/main" xmlns:p="http://schemas.openxmlformats.org/presentationml/2006/main" xmlns:r="http://schemas.openxmlformats.org/officeDocument/2006/relationships">
+  <p:cSld>
+    <p:bg>
+      <p:bgPr>
+        <a:solidFill>
+          <a:srgbClr val="FFFFFF"/>
+        </a:solidFill>
+        <a:effectLst/>
+      </p:bgPr>
+    </p:bg>
+    <p:spTree>
+      <p:nvGrpSpPr>
+        <p:cNvPr id="1" name=""/>
+        <p:cNvGrpSpPr/>
+        <p:nvPr/>
+      </p:nvGrpSpPr>
+      <p:grpSpPr/>
+      <p:sp>
+        <p:nvSpPr>
+          <p:cNvPr id="2" name="Title 1" descr="Slide title: Receiving edits without bleeding"/>
+          <p:cNvSpPr>
+            <a:spLocks noGrp="1"/>
+          </p:cNvSpPr>
+          <p:nvPr>
+            <p:ph type="title"/>
+          </p:nvPr>
+        </p:nvSpPr>
+        <p:spPr>
+          <a:xfrm>
+            <a:off x="502920" y="411480"/>
+            <a:ext cx="11155680" cy="914400"/>
+          </a:xfrm>
+        </p:spPr>
+        <p:txBody>
+          <a:bodyPr wrap="square"/>
+          <a:lstStyle/>
+          <a:p>
+            <a:pPr algn="l"/>
+            <a:r>
+              <a:rPr sz="3200" b="1">
+                <a:solidFill>
+                  <a:srgbClr val="0E4D33"/>
+                </a:solidFill>
+                <a:latin typeface="Cambria"/>
+              </a:rPr>
+              <a:t>Receiving edits without bleeding</a:t>
+            </a:r>
+          </a:p>
+        </p:txBody>
+      </p:sp>
+      <p:sp>
+        <p:nvSpPr>
+          <p:cNvPr id="3" name="TextBox 2" descr="Footer: BADM 225 · Chapter 4"/>
+          <p:cNvSpPr txBox="1"/>
+          <p:nvPr/>
+        </p:nvSpPr>
+        <p:spPr>
+          <a:xfrm>
+            <a:off x="502920" y="6446520"/>
+            <a:ext cx="5486400" cy="320040"/>
+          </a:xfrm>
+          <a:prstGeom prst="rect">
+            <a:avLst/>
+          </a:prstGeom>
+          <a:noFill/>
+        </p:spPr>
+        <p:txBody>
+          <a:bodyPr wrap="none">
+            <a:spAutoFit/>
+          </a:bodyPr>
+          <a:lstStyle/>
+          <a:p>
+            <a:r>
+              <a:rPr sz="1000">
+                <a:solidFill>
+                  <a:srgbClr val="5E6B64"/>
+                </a:solidFill>
+                <a:latin typeface="Calibri"/>
+              </a:rPr>
+              <a:t>BADM 225 · Chapter 4</a:t>
+            </a:r>
+          </a:p>
+        </p:txBody>
+      </p:sp>
+      <p:sp>
+        <p:nvSpPr>
+          <p:cNvPr id="4" name="TextBox 3" descr="Slide number 23"/>
+          <p:cNvSpPr txBox="1"/>
+          <p:nvPr/>
+        </p:nvSpPr>
+        <p:spPr>
+          <a:xfrm>
+            <a:off x="11247120" y="6446520"/>
+            <a:ext cx="640080" cy="320040"/>
+          </a:xfrm>
+          <a:prstGeom prst="rect">
+            <a:avLst/>
+          </a:prstGeom>
+          <a:noFill/>
+        </p:spPr>
+        <p:txBody>
+          <a:bodyPr wrap="none">
+            <a:spAutoFit/>
+          </a:bodyPr>
+          <a:lstStyle/>
+          <a:p>
+            <a:pPr algn="r"/>
+            <a:r>
+              <a:rPr sz="1000">
+                <a:solidFill>
+                  <a:srgbClr val="5E6B64"/>
+                </a:solidFill>
+                <a:latin typeface="Calibri"/>
+              </a:rPr>
+              <a:t>23</a:t>
+            </a:r>
+          </a:p>
+        </p:txBody>
+      </p:sp>
+      <p:sp>
+        <p:nvSpPr>
+          <p:cNvPr id="5" name="TextBox 4" descr="Key points"/>
+          <p:cNvSpPr txBox="1"/>
+          <p:nvPr/>
+        </p:nvSpPr>
+        <p:spPr>
+          <a:xfrm>
+            <a:off x="548640" y="1554480"/>
+            <a:ext cx="11064240" cy="4663440"/>
+          </a:xfrm>
+          <a:prstGeom prst="rect">
+            <a:avLst/>
+          </a:prstGeom>
+          <a:noFill/>
+        </p:spPr>
+        <p:txBody>
+          <a:bodyPr wrap="square">
+            <a:spAutoFit/>
+          </a:bodyPr>
+          <a:lstStyle/>
           <a:p>
             <a:pPr algn="l">
               <a:spcAft>
@@ -10355,7 +10930,7 @@
                 </a:solidFill>
                 <a:latin typeface="Calibri"/>
               </a:rPr>
-              <a:t>Coming next:  </a:t>
+              <a:t>The document is not you.  </a:t>
             </a:r>
             <a:r>
               <a:rPr sz="1700" b="0" i="0">
@@ -10364,7 +10939,2573 @@
                 </a:solidFill>
                 <a:latin typeface="Calibri"/>
               </a:rPr>
-              <a:t>Unit 3 begins — Chapter 5: short workplace messages and digital media, where all four foundation chapters meet the inbox.</a:t>
+              <a:t>Detach on purpose: every mark is a reader telling you where they stumbled — free intelligence, painfully delivered.</a:t>
+            </a:r>
+          </a:p>
+          <a:p>
+            <a:pPr algn="l">
+              <a:spcAft>
+                <a:spcPts val="1200"/>
+              </a:spcAft>
+            </a:pPr>
+            <a:r>
+              <a:rPr sz="1700">
+                <a:solidFill>
+                  <a:srgbClr val="8A6410"/>
+                </a:solidFill>
+                <a:latin typeface="Calibri"/>
+              </a:rPr>
+              <a:t>▪  </a:t>
+            </a:r>
+            <a:r>
+              <a:rPr sz="1700" b="1">
+                <a:solidFill>
+                  <a:srgbClr val="0E4D33"/>
+                </a:solidFill>
+                <a:latin typeface="Calibri"/>
+              </a:rPr>
+              <a:t>Stumbles are data, wording is negotiable.  </a:t>
+            </a:r>
+            <a:r>
+              <a:rPr sz="1700" b="0" i="0">
+                <a:solidFill>
+                  <a:srgbClr val="212A26"/>
+                </a:solidFill>
+                <a:latin typeface="Calibri"/>
+              </a:rPr>
+              <a:t>If a reviewer misread the sentence, the sentence is guilty. You don't have to accept their fix — you do have to fix the stumble.</a:t>
+            </a:r>
+          </a:p>
+          <a:p>
+            <a:pPr algn="l">
+              <a:spcAft>
+                <a:spcPts val="1200"/>
+              </a:spcAft>
+            </a:pPr>
+            <a:r>
+              <a:rPr sz="1700">
+                <a:solidFill>
+                  <a:srgbClr val="8A6410"/>
+                </a:solidFill>
+                <a:latin typeface="Calibri"/>
+              </a:rPr>
+              <a:t>▪  </a:t>
+            </a:r>
+            <a:r>
+              <a:rPr sz="1700" b="1">
+                <a:solidFill>
+                  <a:srgbClr val="0E4D33"/>
+                </a:solidFill>
+                <a:latin typeface="Calibri"/>
+              </a:rPr>
+              <a:t>Ask the clarifying question.  </a:t>
+            </a:r>
+            <a:r>
+              <a:rPr sz="1700" b="0" i="0">
+                <a:solidFill>
+                  <a:srgbClr val="212A26"/>
+                </a:solidFill>
+                <a:latin typeface="Calibri"/>
+              </a:rPr>
+              <a:t>'What did you expect this section to say?' turns a vague 'this is confusing' into an actionable repair.</a:t>
+            </a:r>
+          </a:p>
+          <a:p>
+            <a:pPr algn="l">
+              <a:spcAft>
+                <a:spcPts val="1200"/>
+              </a:spcAft>
+            </a:pPr>
+            <a:r>
+              <a:rPr sz="1700">
+                <a:solidFill>
+                  <a:srgbClr val="8A6410"/>
+                </a:solidFill>
+                <a:latin typeface="Calibri"/>
+              </a:rPr>
+              <a:t>▪  </a:t>
+            </a:r>
+            <a:r>
+              <a:rPr sz="1700" b="1">
+                <a:solidFill>
+                  <a:srgbClr val="0E4D33"/>
+                </a:solidFill>
+                <a:latin typeface="Calibri"/>
+              </a:rPr>
+              <a:t>Thank the harsh reviewer.  </a:t>
+            </a:r>
+            <a:r>
+              <a:rPr sz="1700" b="0" i="0">
+                <a:solidFill>
+                  <a:srgbClr val="212A26"/>
+                </a:solidFill>
+                <a:latin typeface="Calibri"/>
+              </a:rPr>
+              <a:t>The colleague who marks everything is doing what your future readers would have done silently.</a:t>
+            </a:r>
+          </a:p>
+        </p:txBody>
+      </p:sp>
+    </p:spTree>
+  </p:cSld>
+  <p:clrMapOvr>
+    <a:masterClrMapping/>
+  </p:clrMapOvr>
+</p:sld>
+</file>
+
+<file path=ppt/slides/slide24.xml><?xml version="1.0" encoding="utf-8"?>
+<p:sld xmlns:a="http://schemas.openxmlformats.org/drawingml/2006/main" xmlns:p="http://schemas.openxmlformats.org/presentationml/2006/main" xmlns:r="http://schemas.openxmlformats.org/officeDocument/2006/relationships">
+  <p:cSld>
+    <p:bg>
+      <p:bgPr>
+        <a:solidFill>
+          <a:srgbClr val="0E4D33"/>
+        </a:solidFill>
+        <a:effectLst/>
+      </p:bgPr>
+    </p:bg>
+    <p:spTree>
+      <p:nvGrpSpPr>
+        <p:cNvPr id="1" name=""/>
+        <p:cNvGrpSpPr/>
+        <p:nvPr/>
+      </p:nvGrpSpPr>
+      <p:grpSpPr/>
+      <p:sp>
+        <p:nvSpPr>
+          <p:cNvPr id="2" name="Title 1" descr="Slide title: Revision under pressure"/>
+          <p:cNvSpPr>
+            <a:spLocks noGrp="1"/>
+          </p:cNvSpPr>
+          <p:nvPr>
+            <p:ph type="title"/>
+          </p:nvPr>
+        </p:nvSpPr>
+        <p:spPr>
+          <a:xfrm>
+            <a:off x="822960" y="2834640"/>
+            <a:ext cx="10515600" cy="914400"/>
+          </a:xfrm>
+        </p:spPr>
+        <p:txBody>
+          <a:bodyPr wrap="square"/>
+          <a:lstStyle/>
+          <a:p>
+            <a:pPr algn="l"/>
+            <a:r>
+              <a:rPr sz="4000" b="1">
+                <a:solidFill>
+                  <a:srgbClr val="FFFFFF"/>
+                </a:solidFill>
+                <a:latin typeface="Cambria"/>
+              </a:rPr>
+              <a:t>Revision under pressure</a:t>
+            </a:r>
+          </a:p>
+        </p:txBody>
+      </p:sp>
+      <p:sp>
+        <p:nvSpPr>
+          <p:cNvPr id="3" name="TextBox 2" descr="Section number 06"/>
+          <p:cNvSpPr txBox="1"/>
+          <p:nvPr/>
+        </p:nvSpPr>
+        <p:spPr>
+          <a:xfrm>
+            <a:off x="822960" y="1188720"/>
+            <a:ext cx="2743200" cy="1463040"/>
+          </a:xfrm>
+          <a:prstGeom prst="rect">
+            <a:avLst/>
+          </a:prstGeom>
+          <a:noFill/>
+        </p:spPr>
+        <p:txBody>
+          <a:bodyPr wrap="square">
+            <a:spAutoFit/>
+          </a:bodyPr>
+          <a:lstStyle/>
+          <a:p>
+            <a:pPr algn="l">
+              <a:spcAft>
+                <a:spcPts val="800"/>
+              </a:spcAft>
+            </a:pPr>
+            <a:r>
+              <a:rPr sz="8000" b="1" i="0">
+                <a:solidFill>
+                  <a:srgbClr val="C9931A"/>
+                </a:solidFill>
+                <a:latin typeface="Cambria"/>
+              </a:rPr>
+              <a:t>06</a:t>
+            </a:r>
+          </a:p>
+        </p:txBody>
+      </p:sp>
+      <p:sp>
+        <p:nvSpPr>
+          <p:cNvPr id="4" name="TextBox 3" descr="Section note"/>
+          <p:cNvSpPr txBox="1"/>
+          <p:nvPr/>
+        </p:nvSpPr>
+        <p:spPr>
+          <a:xfrm>
+            <a:off x="822960" y="4023360"/>
+            <a:ext cx="9601200" cy="1097280"/>
+          </a:xfrm>
+          <a:prstGeom prst="rect">
+            <a:avLst/>
+          </a:prstGeom>
+          <a:noFill/>
+        </p:spPr>
+        <p:txBody>
+          <a:bodyPr wrap="square">
+            <a:spAutoFit/>
+          </a:bodyPr>
+          <a:lstStyle/>
+          <a:p>
+            <a:pPr algn="l">
+              <a:spcAft>
+                <a:spcPts val="800"/>
+              </a:spcAft>
+            </a:pPr>
+            <a:r>
+              <a:rPr sz="1700" b="0" i="0">
+                <a:solidFill>
+                  <a:srgbClr val="EAF1EB"/>
+                </a:solidFill>
+                <a:latin typeface="Calibri"/>
+              </a:rPr>
+              <a:t>No time for three passes? There's still a system for five minutes.</a:t>
+            </a:r>
+          </a:p>
+        </p:txBody>
+      </p:sp>
+      <p:sp>
+        <p:nvSpPr>
+          <p:cNvPr id="5" name="TextBox 4" descr="Footer: BADM 225 · Chapter 4"/>
+          <p:cNvSpPr txBox="1"/>
+          <p:nvPr/>
+        </p:nvSpPr>
+        <p:spPr>
+          <a:xfrm>
+            <a:off x="502920" y="6446520"/>
+            <a:ext cx="5486400" cy="320040"/>
+          </a:xfrm>
+          <a:prstGeom prst="rect">
+            <a:avLst/>
+          </a:prstGeom>
+          <a:noFill/>
+        </p:spPr>
+        <p:txBody>
+          <a:bodyPr wrap="none">
+            <a:spAutoFit/>
+          </a:bodyPr>
+          <a:lstStyle/>
+          <a:p>
+            <a:r>
+              <a:rPr sz="1000">
+                <a:solidFill>
+                  <a:srgbClr val="5E6B64"/>
+                </a:solidFill>
+                <a:latin typeface="Calibri"/>
+              </a:rPr>
+              <a:t>BADM 225 · Chapter 4</a:t>
+            </a:r>
+          </a:p>
+        </p:txBody>
+      </p:sp>
+      <p:sp>
+        <p:nvSpPr>
+          <p:cNvPr id="6" name="TextBox 5" descr="Slide number 24"/>
+          <p:cNvSpPr txBox="1"/>
+          <p:nvPr/>
+        </p:nvSpPr>
+        <p:spPr>
+          <a:xfrm>
+            <a:off x="11247120" y="6446520"/>
+            <a:ext cx="640080" cy="320040"/>
+          </a:xfrm>
+          <a:prstGeom prst="rect">
+            <a:avLst/>
+          </a:prstGeom>
+          <a:noFill/>
+        </p:spPr>
+        <p:txBody>
+          <a:bodyPr wrap="none">
+            <a:spAutoFit/>
+          </a:bodyPr>
+          <a:lstStyle/>
+          <a:p>
+            <a:pPr algn="r"/>
+            <a:r>
+              <a:rPr sz="1000">
+                <a:solidFill>
+                  <a:srgbClr val="5E6B64"/>
+                </a:solidFill>
+                <a:latin typeface="Calibri"/>
+              </a:rPr>
+              <a:t>24</a:t>
+            </a:r>
+          </a:p>
+        </p:txBody>
+      </p:sp>
+    </p:spTree>
+  </p:cSld>
+  <p:clrMapOvr>
+    <a:masterClrMapping/>
+  </p:clrMapOvr>
+</p:sld>
+</file>
+
+<file path=ppt/slides/slide25.xml><?xml version="1.0" encoding="utf-8"?>
+<p:sld xmlns:a="http://schemas.openxmlformats.org/drawingml/2006/main" xmlns:p="http://schemas.openxmlformats.org/presentationml/2006/main" xmlns:r="http://schemas.openxmlformats.org/officeDocument/2006/relationships">
+  <p:cSld>
+    <p:bg>
+      <p:bgPr>
+        <a:solidFill>
+          <a:srgbClr val="FFFFFF"/>
+        </a:solidFill>
+        <a:effectLst/>
+      </p:bgPr>
+    </p:bg>
+    <p:spTree>
+      <p:nvGrpSpPr>
+        <p:cNvPr id="1" name=""/>
+        <p:cNvGrpSpPr/>
+        <p:nvPr/>
+      </p:nvGrpSpPr>
+      <p:grpSpPr/>
+      <p:sp>
+        <p:nvSpPr>
+          <p:cNvPr id="2" name="Title 1" descr="Slide title: The five-minute triage (in strict order)"/>
+          <p:cNvSpPr>
+            <a:spLocks noGrp="1"/>
+          </p:cNvSpPr>
+          <p:nvPr>
+            <p:ph type="title"/>
+          </p:nvPr>
+        </p:nvSpPr>
+        <p:spPr>
+          <a:xfrm>
+            <a:off x="502920" y="411480"/>
+            <a:ext cx="11155680" cy="914400"/>
+          </a:xfrm>
+        </p:spPr>
+        <p:txBody>
+          <a:bodyPr wrap="square"/>
+          <a:lstStyle/>
+          <a:p>
+            <a:pPr algn="l"/>
+            <a:r>
+              <a:rPr sz="3200" b="1">
+                <a:solidFill>
+                  <a:srgbClr val="0E4D33"/>
+                </a:solidFill>
+                <a:latin typeface="Cambria"/>
+              </a:rPr>
+              <a:t>The five-minute triage (in strict order)</a:t>
+            </a:r>
+          </a:p>
+        </p:txBody>
+      </p:sp>
+      <p:sp>
+        <p:nvSpPr>
+          <p:cNvPr id="3" name="TextBox 2" descr="Footer: BADM 225 · Chapter 4"/>
+          <p:cNvSpPr txBox="1"/>
+          <p:nvPr/>
+        </p:nvSpPr>
+        <p:spPr>
+          <a:xfrm>
+            <a:off x="502920" y="6446520"/>
+            <a:ext cx="5486400" cy="320040"/>
+          </a:xfrm>
+          <a:prstGeom prst="rect">
+            <a:avLst/>
+          </a:prstGeom>
+          <a:noFill/>
+        </p:spPr>
+        <p:txBody>
+          <a:bodyPr wrap="none">
+            <a:spAutoFit/>
+          </a:bodyPr>
+          <a:lstStyle/>
+          <a:p>
+            <a:r>
+              <a:rPr sz="1000">
+                <a:solidFill>
+                  <a:srgbClr val="5E6B64"/>
+                </a:solidFill>
+                <a:latin typeface="Calibri"/>
+              </a:rPr>
+              <a:t>BADM 225 · Chapter 4</a:t>
+            </a:r>
+          </a:p>
+        </p:txBody>
+      </p:sp>
+      <p:sp>
+        <p:nvSpPr>
+          <p:cNvPr id="4" name="TextBox 3" descr="Slide number 25"/>
+          <p:cNvSpPr txBox="1"/>
+          <p:nvPr/>
+        </p:nvSpPr>
+        <p:spPr>
+          <a:xfrm>
+            <a:off x="11247120" y="6446520"/>
+            <a:ext cx="640080" cy="320040"/>
+          </a:xfrm>
+          <a:prstGeom prst="rect">
+            <a:avLst/>
+          </a:prstGeom>
+          <a:noFill/>
+        </p:spPr>
+        <p:txBody>
+          <a:bodyPr wrap="none">
+            <a:spAutoFit/>
+          </a:bodyPr>
+          <a:lstStyle/>
+          <a:p>
+            <a:pPr algn="r"/>
+            <a:r>
+              <a:rPr sz="1000">
+                <a:solidFill>
+                  <a:srgbClr val="5E6B64"/>
+                </a:solidFill>
+                <a:latin typeface="Calibri"/>
+              </a:rPr>
+              <a:t>25</a:t>
+            </a:r>
+          </a:p>
+        </p:txBody>
+      </p:sp>
+      <p:sp>
+        <p:nvSpPr>
+          <p:cNvPr id="5" name="TextBox 4" descr="Context"/>
+          <p:cNvSpPr txBox="1"/>
+          <p:nvPr/>
+        </p:nvSpPr>
+        <p:spPr>
+          <a:xfrm>
+            <a:off x="548640" y="1417320"/>
+            <a:ext cx="10972800" cy="411480"/>
+          </a:xfrm>
+          <a:prstGeom prst="rect">
+            <a:avLst/>
+          </a:prstGeom>
+          <a:noFill/>
+        </p:spPr>
+        <p:txBody>
+          <a:bodyPr wrap="square">
+            <a:spAutoFit/>
+          </a:bodyPr>
+          <a:lstStyle/>
+          <a:p>
+            <a:pPr algn="l">
+              <a:spcAft>
+                <a:spcPts val="800"/>
+              </a:spcAft>
+            </a:pPr>
+            <a:r>
+              <a:rPr sz="1400" b="0" i="1">
+                <a:solidFill>
+                  <a:srgbClr val="5E6B64"/>
+                </a:solidFill>
+                <a:latin typeface="Calibri"/>
+              </a:rPr>
+              <a:t>When time is short, spend it where errors cost most — not evenly.</a:t>
+            </a:r>
+          </a:p>
+        </p:txBody>
+      </p:sp>
+      <p:sp>
+        <p:nvSpPr>
+          <p:cNvPr id="6" name="Oval 5" descr="The last-thing check icon"/>
+          <p:cNvSpPr/>
+          <p:nvPr/>
+        </p:nvSpPr>
+        <p:spPr>
+          <a:xfrm>
+            <a:off x="640080" y="1975104"/>
+            <a:ext cx="566928" cy="566928"/>
+          </a:xfrm>
+          <a:prstGeom prst="ellipse">
+            <a:avLst/>
+          </a:prstGeom>
+          <a:solidFill>
+            <a:srgbClr val="0E4D33"/>
+          </a:solidFill>
+          <a:ln>
+            <a:noFill/>
+          </a:ln>
+          <a:effectLst/>
+        </p:spPr>
+        <p:style>
+          <a:lnRef idx="1">
+            <a:schemeClr val="accent1"/>
+          </a:lnRef>
+          <a:fillRef idx="3">
+            <a:schemeClr val="accent1"/>
+          </a:fillRef>
+          <a:effectRef idx="2">
+            <a:schemeClr val="accent1"/>
+          </a:effectRef>
+          <a:fontRef idx="minor">
+            <a:schemeClr val="lt1"/>
+          </a:fontRef>
+        </p:style>
+        <p:txBody>
+          <a:bodyPr rtlCol="0" anchor="ctr" lIns="0" rIns="0" tIns="0" bIns="0"/>
+          <a:lstStyle/>
+          <a:p>
+            <a:pPr algn="ctr"/>
+            <a:r>
+              <a:rPr sz="1600" b="1">
+                <a:solidFill>
+                  <a:srgbClr val="FFFFFF"/>
+                </a:solidFill>
+                <a:latin typeface="Calibri"/>
+              </a:rPr>
+              <a:t>1</a:t>
+            </a:r>
+          </a:p>
+        </p:txBody>
+      </p:sp>
+      <p:sp>
+        <p:nvSpPr>
+          <p:cNvPr id="7" name="TextBox 6" descr="The last-thing check"/>
+          <p:cNvSpPr txBox="1"/>
+          <p:nvPr/>
+        </p:nvSpPr>
+        <p:spPr>
+          <a:xfrm>
+            <a:off x="1417320" y="1920240"/>
+            <a:ext cx="10241280" cy="914400"/>
+          </a:xfrm>
+          <a:prstGeom prst="rect">
+            <a:avLst/>
+          </a:prstGeom>
+          <a:noFill/>
+        </p:spPr>
+        <p:txBody>
+          <a:bodyPr wrap="square">
+            <a:spAutoFit/>
+          </a:bodyPr>
+          <a:lstStyle/>
+          <a:p>
+            <a:pPr algn="l">
+              <a:spcAft>
+                <a:spcPts val="200"/>
+              </a:spcAft>
+            </a:pPr>
+            <a:r>
+              <a:rPr sz="1650" b="1" i="0">
+                <a:solidFill>
+                  <a:srgbClr val="0E4D33"/>
+                </a:solidFill>
+                <a:latin typeface="Cambria"/>
+              </a:rPr>
+              <a:t>The last-thing check</a:t>
+            </a:r>
+          </a:p>
+          <a:p>
+            <a:pPr algn="l">
+              <a:spcAft>
+                <a:spcPts val="0"/>
+              </a:spcAft>
+            </a:pPr>
+            <a:r>
+              <a:rPr sz="1550" b="0" i="0">
+                <a:solidFill>
+                  <a:srgbClr val="212A26"/>
+                </a:solidFill>
+                <a:latin typeface="Calibri"/>
+              </a:rPr>
+              <a:t>Recipients · subject line · attachment. Twenty seconds against the classic catastrophes.</a:t>
+            </a:r>
+          </a:p>
+        </p:txBody>
+      </p:sp>
+      <p:sp>
+        <p:nvSpPr>
+          <p:cNvPr id="8" name="Oval 7" descr="Names and numbers icon"/>
+          <p:cNvSpPr/>
+          <p:nvPr/>
+        </p:nvSpPr>
+        <p:spPr>
+          <a:xfrm>
+            <a:off x="640080" y="2999232"/>
+            <a:ext cx="566928" cy="566928"/>
+          </a:xfrm>
+          <a:prstGeom prst="ellipse">
+            <a:avLst/>
+          </a:prstGeom>
+          <a:solidFill>
+            <a:srgbClr val="0E4D33"/>
+          </a:solidFill>
+          <a:ln>
+            <a:noFill/>
+          </a:ln>
+          <a:effectLst/>
+        </p:spPr>
+        <p:style>
+          <a:lnRef idx="1">
+            <a:schemeClr val="accent1"/>
+          </a:lnRef>
+          <a:fillRef idx="3">
+            <a:schemeClr val="accent1"/>
+          </a:fillRef>
+          <a:effectRef idx="2">
+            <a:schemeClr val="accent1"/>
+          </a:effectRef>
+          <a:fontRef idx="minor">
+            <a:schemeClr val="lt1"/>
+          </a:fontRef>
+        </p:style>
+        <p:txBody>
+          <a:bodyPr rtlCol="0" anchor="ctr" lIns="0" rIns="0" tIns="0" bIns="0"/>
+          <a:lstStyle/>
+          <a:p>
+            <a:pPr algn="ctr"/>
+            <a:r>
+              <a:rPr sz="1600" b="1">
+                <a:solidFill>
+                  <a:srgbClr val="FFFFFF"/>
+                </a:solidFill>
+                <a:latin typeface="Calibri"/>
+              </a:rPr>
+              <a:t>2</a:t>
+            </a:r>
+          </a:p>
+        </p:txBody>
+      </p:sp>
+      <p:sp>
+        <p:nvSpPr>
+          <p:cNvPr id="9" name="TextBox 8" descr="Names and numbers"/>
+          <p:cNvSpPr txBox="1"/>
+          <p:nvPr/>
+        </p:nvSpPr>
+        <p:spPr>
+          <a:xfrm>
+            <a:off x="1417320" y="2944368"/>
+            <a:ext cx="10241280" cy="914400"/>
+          </a:xfrm>
+          <a:prstGeom prst="rect">
+            <a:avLst/>
+          </a:prstGeom>
+          <a:noFill/>
+        </p:spPr>
+        <p:txBody>
+          <a:bodyPr wrap="square">
+            <a:spAutoFit/>
+          </a:bodyPr>
+          <a:lstStyle/>
+          <a:p>
+            <a:pPr algn="l">
+              <a:spcAft>
+                <a:spcPts val="200"/>
+              </a:spcAft>
+            </a:pPr>
+            <a:r>
+              <a:rPr sz="1650" b="1" i="0">
+                <a:solidFill>
+                  <a:srgbClr val="0E4D33"/>
+                </a:solidFill>
+                <a:latin typeface="Cambria"/>
+              </a:rPr>
+              <a:t>Names and numbers</a:t>
+            </a:r>
+          </a:p>
+          <a:p>
+            <a:pPr algn="l">
+              <a:spcAft>
+                <a:spcPts val="0"/>
+              </a:spcAft>
+            </a:pPr>
+            <a:r>
+              <a:rPr sz="1550" b="0" i="0">
+                <a:solidFill>
+                  <a:srgbClr val="212A26"/>
+                </a:solidFill>
+                <a:latin typeface="Calibri"/>
+              </a:rPr>
+              <a:t>Verify every one against its source — highest damage per error, fastest to check.</a:t>
+            </a:r>
+          </a:p>
+        </p:txBody>
+      </p:sp>
+      <p:sp>
+        <p:nvSpPr>
+          <p:cNvPr id="10" name="Oval 9" descr="The first sentence icon"/>
+          <p:cNvSpPr/>
+          <p:nvPr/>
+        </p:nvSpPr>
+        <p:spPr>
+          <a:xfrm>
+            <a:off x="640080" y="4023360"/>
+            <a:ext cx="566928" cy="566928"/>
+          </a:xfrm>
+          <a:prstGeom prst="ellipse">
+            <a:avLst/>
+          </a:prstGeom>
+          <a:solidFill>
+            <a:srgbClr val="0E4D33"/>
+          </a:solidFill>
+          <a:ln>
+            <a:noFill/>
+          </a:ln>
+          <a:effectLst/>
+        </p:spPr>
+        <p:style>
+          <a:lnRef idx="1">
+            <a:schemeClr val="accent1"/>
+          </a:lnRef>
+          <a:fillRef idx="3">
+            <a:schemeClr val="accent1"/>
+          </a:fillRef>
+          <a:effectRef idx="2">
+            <a:schemeClr val="accent1"/>
+          </a:effectRef>
+          <a:fontRef idx="minor">
+            <a:schemeClr val="lt1"/>
+          </a:fontRef>
+        </p:style>
+        <p:txBody>
+          <a:bodyPr rtlCol="0" anchor="ctr" lIns="0" rIns="0" tIns="0" bIns="0"/>
+          <a:lstStyle/>
+          <a:p>
+            <a:pPr algn="ctr"/>
+            <a:r>
+              <a:rPr sz="1600" b="1">
+                <a:solidFill>
+                  <a:srgbClr val="FFFFFF"/>
+                </a:solidFill>
+                <a:latin typeface="Calibri"/>
+              </a:rPr>
+              <a:t>3</a:t>
+            </a:r>
+          </a:p>
+        </p:txBody>
+      </p:sp>
+      <p:sp>
+        <p:nvSpPr>
+          <p:cNvPr id="11" name="TextBox 10" descr="The first sentence"/>
+          <p:cNvSpPr txBox="1"/>
+          <p:nvPr/>
+        </p:nvSpPr>
+        <p:spPr>
+          <a:xfrm>
+            <a:off x="1417320" y="3968496"/>
+            <a:ext cx="10241280" cy="914400"/>
+          </a:xfrm>
+          <a:prstGeom prst="rect">
+            <a:avLst/>
+          </a:prstGeom>
+          <a:noFill/>
+        </p:spPr>
+        <p:txBody>
+          <a:bodyPr wrap="square">
+            <a:spAutoFit/>
+          </a:bodyPr>
+          <a:lstStyle/>
+          <a:p>
+            <a:pPr algn="l">
+              <a:spcAft>
+                <a:spcPts val="200"/>
+              </a:spcAft>
+            </a:pPr>
+            <a:r>
+              <a:rPr sz="1650" b="1" i="0">
+                <a:solidFill>
+                  <a:srgbClr val="0E4D33"/>
+                </a:solidFill>
+                <a:latin typeface="Cambria"/>
+              </a:rPr>
+              <a:t>The first sentence</a:t>
+            </a:r>
+          </a:p>
+          <a:p>
+            <a:pPr algn="l">
+              <a:spcAft>
+                <a:spcPts val="0"/>
+              </a:spcAft>
+            </a:pPr>
+            <a:r>
+              <a:rPr sz="1550" b="0" i="0">
+                <a:solidFill>
+                  <a:srgbClr val="212A26"/>
+                </a:solidFill>
+                <a:latin typeface="Calibri"/>
+              </a:rPr>
+              <a:t>Is the main point there? A buried lead fails even with perfect grammar.</a:t>
+            </a:r>
+          </a:p>
+        </p:txBody>
+      </p:sp>
+      <p:sp>
+        <p:nvSpPr>
+          <p:cNvPr id="12" name="Oval 11" descr="Read the riskiest paragraph aloud icon"/>
+          <p:cNvSpPr/>
+          <p:nvPr/>
+        </p:nvSpPr>
+        <p:spPr>
+          <a:xfrm>
+            <a:off x="640080" y="5047488"/>
+            <a:ext cx="566928" cy="566928"/>
+          </a:xfrm>
+          <a:prstGeom prst="ellipse">
+            <a:avLst/>
+          </a:prstGeom>
+          <a:solidFill>
+            <a:srgbClr val="0E4D33"/>
+          </a:solidFill>
+          <a:ln>
+            <a:noFill/>
+          </a:ln>
+          <a:effectLst/>
+        </p:spPr>
+        <p:style>
+          <a:lnRef idx="1">
+            <a:schemeClr val="accent1"/>
+          </a:lnRef>
+          <a:fillRef idx="3">
+            <a:schemeClr val="accent1"/>
+          </a:fillRef>
+          <a:effectRef idx="2">
+            <a:schemeClr val="accent1"/>
+          </a:effectRef>
+          <a:fontRef idx="minor">
+            <a:schemeClr val="lt1"/>
+          </a:fontRef>
+        </p:style>
+        <p:txBody>
+          <a:bodyPr rtlCol="0" anchor="ctr" lIns="0" rIns="0" tIns="0" bIns="0"/>
+          <a:lstStyle/>
+          <a:p>
+            <a:pPr algn="ctr"/>
+            <a:r>
+              <a:rPr sz="1600" b="1">
+                <a:solidFill>
+                  <a:srgbClr val="FFFFFF"/>
+                </a:solidFill>
+                <a:latin typeface="Calibri"/>
+              </a:rPr>
+              <a:t>4</a:t>
+            </a:r>
+          </a:p>
+        </p:txBody>
+      </p:sp>
+      <p:sp>
+        <p:nvSpPr>
+          <p:cNvPr id="13" name="TextBox 12" descr="Read the riskiest paragraph aloud"/>
+          <p:cNvSpPr txBox="1"/>
+          <p:nvPr/>
+        </p:nvSpPr>
+        <p:spPr>
+          <a:xfrm>
+            <a:off x="1417320" y="4992624"/>
+            <a:ext cx="10241280" cy="914400"/>
+          </a:xfrm>
+          <a:prstGeom prst="rect">
+            <a:avLst/>
+          </a:prstGeom>
+          <a:noFill/>
+        </p:spPr>
+        <p:txBody>
+          <a:bodyPr wrap="square">
+            <a:spAutoFit/>
+          </a:bodyPr>
+          <a:lstStyle/>
+          <a:p>
+            <a:pPr algn="l">
+              <a:spcAft>
+                <a:spcPts val="200"/>
+              </a:spcAft>
+            </a:pPr>
+            <a:r>
+              <a:rPr sz="1650" b="1" i="0">
+                <a:solidFill>
+                  <a:srgbClr val="0E4D33"/>
+                </a:solidFill>
+                <a:latin typeface="Cambria"/>
+              </a:rPr>
+              <a:t>Read the riskiest paragraph aloud</a:t>
+            </a:r>
+          </a:p>
+          <a:p>
+            <a:pPr algn="l">
+              <a:spcAft>
+                <a:spcPts val="0"/>
+              </a:spcAft>
+            </a:pPr>
+            <a:r>
+              <a:rPr sz="1550" b="0" i="0">
+                <a:solidFill>
+                  <a:srgbClr val="212A26"/>
+                </a:solidFill>
+                <a:latin typeface="Calibri"/>
+              </a:rPr>
+              <a:t>The one with the bad news, the money, or the ask — ears on the highest-stakes prose only.</a:t>
+            </a:r>
+          </a:p>
+        </p:txBody>
+      </p:sp>
+      <p:sp>
+        <p:nvSpPr>
+          <p:cNvPr id="14" name="Oval 13" descr="One flab sweep of the opening icon"/>
+          <p:cNvSpPr/>
+          <p:nvPr/>
+        </p:nvSpPr>
+        <p:spPr>
+          <a:xfrm>
+            <a:off x="640080" y="6071616"/>
+            <a:ext cx="566928" cy="566928"/>
+          </a:xfrm>
+          <a:prstGeom prst="ellipse">
+            <a:avLst/>
+          </a:prstGeom>
+          <a:solidFill>
+            <a:srgbClr val="0E4D33"/>
+          </a:solidFill>
+          <a:ln>
+            <a:noFill/>
+          </a:ln>
+          <a:effectLst/>
+        </p:spPr>
+        <p:style>
+          <a:lnRef idx="1">
+            <a:schemeClr val="accent1"/>
+          </a:lnRef>
+          <a:fillRef idx="3">
+            <a:schemeClr val="accent1"/>
+          </a:fillRef>
+          <a:effectRef idx="2">
+            <a:schemeClr val="accent1"/>
+          </a:effectRef>
+          <a:fontRef idx="minor">
+            <a:schemeClr val="lt1"/>
+          </a:fontRef>
+        </p:style>
+        <p:txBody>
+          <a:bodyPr rtlCol="0" anchor="ctr" lIns="0" rIns="0" tIns="0" bIns="0"/>
+          <a:lstStyle/>
+          <a:p>
+            <a:pPr algn="ctr"/>
+            <a:r>
+              <a:rPr sz="1600" b="1">
+                <a:solidFill>
+                  <a:srgbClr val="FFFFFF"/>
+                </a:solidFill>
+                <a:latin typeface="Calibri"/>
+              </a:rPr>
+              <a:t>5</a:t>
+            </a:r>
+          </a:p>
+        </p:txBody>
+      </p:sp>
+      <p:sp>
+        <p:nvSpPr>
+          <p:cNvPr id="15" name="TextBox 14" descr="One flab sweep of the opening"/>
+          <p:cNvSpPr txBox="1"/>
+          <p:nvPr/>
+        </p:nvSpPr>
+        <p:spPr>
+          <a:xfrm>
+            <a:off x="1417320" y="6016752"/>
+            <a:ext cx="10241280" cy="914400"/>
+          </a:xfrm>
+          <a:prstGeom prst="rect">
+            <a:avLst/>
+          </a:prstGeom>
+          <a:noFill/>
+        </p:spPr>
+        <p:txBody>
+          <a:bodyPr wrap="square">
+            <a:spAutoFit/>
+          </a:bodyPr>
+          <a:lstStyle/>
+          <a:p>
+            <a:pPr algn="l">
+              <a:spcAft>
+                <a:spcPts val="200"/>
+              </a:spcAft>
+            </a:pPr>
+            <a:r>
+              <a:rPr sz="1650" b="1" i="0">
+                <a:solidFill>
+                  <a:srgbClr val="0E4D33"/>
+                </a:solidFill>
+                <a:latin typeface="Cambria"/>
+              </a:rPr>
+              <a:t>One flab sweep of the opening</a:t>
+            </a:r>
+          </a:p>
+          <a:p>
+            <a:pPr algn="l">
+              <a:spcAft>
+                <a:spcPts val="0"/>
+              </a:spcAft>
+            </a:pPr>
+            <a:r>
+              <a:rPr sz="1550" b="0" i="0">
+                <a:solidFill>
+                  <a:srgbClr val="212A26"/>
+                </a:solidFill>
+                <a:latin typeface="Calibri"/>
+              </a:rPr>
+              <a:t>Readers judge in the first three lines; trim those hardest.</a:t>
+            </a:r>
+          </a:p>
+        </p:txBody>
+      </p:sp>
+    </p:spTree>
+  </p:cSld>
+  <p:clrMapOvr>
+    <a:masterClrMapping/>
+  </p:clrMapOvr>
+</p:sld>
+</file>
+
+<file path=ppt/slides/slide26.xml><?xml version="1.0" encoding="utf-8"?>
+<p:sld xmlns:a="http://schemas.openxmlformats.org/drawingml/2006/main" xmlns:p="http://schemas.openxmlformats.org/presentationml/2006/main" xmlns:r="http://schemas.openxmlformats.org/officeDocument/2006/relationships">
+  <p:cSld>
+    <p:bg>
+      <p:bgPr>
+        <a:solidFill>
+          <a:srgbClr val="FFFFFF"/>
+        </a:solidFill>
+        <a:effectLst/>
+      </p:bgPr>
+    </p:bg>
+    <p:spTree>
+      <p:nvGrpSpPr>
+        <p:cNvPr id="1" name=""/>
+        <p:cNvGrpSpPr/>
+        <p:nvPr/>
+      </p:nvGrpSpPr>
+      <p:grpSpPr/>
+      <p:sp>
+        <p:nvSpPr>
+          <p:cNvPr id="2" name="Title 1" descr="Slide title: AI as a revision assistant — the right prompts"/>
+          <p:cNvSpPr>
+            <a:spLocks noGrp="1"/>
+          </p:cNvSpPr>
+          <p:nvPr>
+            <p:ph type="title"/>
+          </p:nvPr>
+        </p:nvSpPr>
+        <p:spPr>
+          <a:xfrm>
+            <a:off x="502920" y="411480"/>
+            <a:ext cx="11155680" cy="914400"/>
+          </a:xfrm>
+        </p:spPr>
+        <p:txBody>
+          <a:bodyPr wrap="square"/>
+          <a:lstStyle/>
+          <a:p>
+            <a:pPr algn="l"/>
+            <a:r>
+              <a:rPr sz="3200" b="1">
+                <a:solidFill>
+                  <a:srgbClr val="0E4D33"/>
+                </a:solidFill>
+                <a:latin typeface="Cambria"/>
+              </a:rPr>
+              <a:t>AI as a revision assistant — the right prompts</a:t>
+            </a:r>
+          </a:p>
+        </p:txBody>
+      </p:sp>
+      <p:sp>
+        <p:nvSpPr>
+          <p:cNvPr id="3" name="TextBox 2" descr="Footer: BADM 225 · Chapter 4"/>
+          <p:cNvSpPr txBox="1"/>
+          <p:nvPr/>
+        </p:nvSpPr>
+        <p:spPr>
+          <a:xfrm>
+            <a:off x="502920" y="6446520"/>
+            <a:ext cx="5486400" cy="320040"/>
+          </a:xfrm>
+          <a:prstGeom prst="rect">
+            <a:avLst/>
+          </a:prstGeom>
+          <a:noFill/>
+        </p:spPr>
+        <p:txBody>
+          <a:bodyPr wrap="none">
+            <a:spAutoFit/>
+          </a:bodyPr>
+          <a:lstStyle/>
+          <a:p>
+            <a:r>
+              <a:rPr sz="1000">
+                <a:solidFill>
+                  <a:srgbClr val="5E6B64"/>
+                </a:solidFill>
+                <a:latin typeface="Calibri"/>
+              </a:rPr>
+              <a:t>BADM 225 · Chapter 4</a:t>
+            </a:r>
+          </a:p>
+        </p:txBody>
+      </p:sp>
+      <p:sp>
+        <p:nvSpPr>
+          <p:cNvPr id="4" name="TextBox 3" descr="Slide number 26"/>
+          <p:cNvSpPr txBox="1"/>
+          <p:nvPr/>
+        </p:nvSpPr>
+        <p:spPr>
+          <a:xfrm>
+            <a:off x="11247120" y="6446520"/>
+            <a:ext cx="640080" cy="320040"/>
+          </a:xfrm>
+          <a:prstGeom prst="rect">
+            <a:avLst/>
+          </a:prstGeom>
+          <a:noFill/>
+        </p:spPr>
+        <p:txBody>
+          <a:bodyPr wrap="none">
+            <a:spAutoFit/>
+          </a:bodyPr>
+          <a:lstStyle/>
+          <a:p>
+            <a:pPr algn="r"/>
+            <a:r>
+              <a:rPr sz="1000">
+                <a:solidFill>
+                  <a:srgbClr val="5E6B64"/>
+                </a:solidFill>
+                <a:latin typeface="Calibri"/>
+              </a:rPr>
+              <a:t>26</a:t>
+            </a:r>
+          </a:p>
+        </p:txBody>
+      </p:sp>
+      <p:sp>
+        <p:nvSpPr>
+          <p:cNvPr id="5" name="TextBox 4" descr="Key points"/>
+          <p:cNvSpPr txBox="1"/>
+          <p:nvPr/>
+        </p:nvSpPr>
+        <p:spPr>
+          <a:xfrm>
+            <a:off x="548640" y="1554480"/>
+            <a:ext cx="11064240" cy="4663440"/>
+          </a:xfrm>
+          <a:prstGeom prst="rect">
+            <a:avLst/>
+          </a:prstGeom>
+          <a:noFill/>
+        </p:spPr>
+        <p:txBody>
+          <a:bodyPr wrap="square">
+            <a:spAutoFit/>
+          </a:bodyPr>
+          <a:lstStyle/>
+          <a:p>
+            <a:pPr algn="l">
+              <a:spcAft>
+                <a:spcPts val="1200"/>
+              </a:spcAft>
+            </a:pPr>
+            <a:r>
+              <a:rPr sz="1700">
+                <a:solidFill>
+                  <a:srgbClr val="8A6410"/>
+                </a:solidFill>
+                <a:latin typeface="Calibri"/>
+              </a:rPr>
+              <a:t>▪  </a:t>
+            </a:r>
+            <a:r>
+              <a:rPr sz="1700" b="1">
+                <a:solidFill>
+                  <a:srgbClr val="0E4D33"/>
+                </a:solidFill>
+                <a:latin typeface="Calibri"/>
+              </a:rPr>
+              <a:t>Ask for critique, not rewrites.  </a:t>
+            </a:r>
+            <a:r>
+              <a:rPr sz="1700" b="0" i="0">
+                <a:solidFill>
+                  <a:srgbClr val="212A26"/>
+                </a:solidFill>
+                <a:latin typeface="Calibri"/>
+              </a:rPr>
+              <a:t>'List the three biggest clarity problems' keeps you the writer; 'rewrite this' makes you the typist of someone else's voice.</a:t>
+            </a:r>
+          </a:p>
+          <a:p>
+            <a:pPr algn="l">
+              <a:spcAft>
+                <a:spcPts val="1200"/>
+              </a:spcAft>
+            </a:pPr>
+            <a:r>
+              <a:rPr sz="1700">
+                <a:solidFill>
+                  <a:srgbClr val="8A6410"/>
+                </a:solidFill>
+                <a:latin typeface="Calibri"/>
+              </a:rPr>
+              <a:t>▪  </a:t>
+            </a:r>
+            <a:r>
+              <a:rPr sz="1700" b="1">
+                <a:solidFill>
+                  <a:srgbClr val="0E4D33"/>
+                </a:solidFill>
+                <a:latin typeface="Calibri"/>
+              </a:rPr>
+              <a:t>Ask targeted passes.  </a:t>
+            </a:r>
+            <a:r>
+              <a:rPr sz="1700" b="0" i="0">
+                <a:solidFill>
+                  <a:srgbClr val="212A26"/>
+                </a:solidFill>
+                <a:latin typeface="Calibri"/>
+              </a:rPr>
+              <a:t>'Check subject-verb agreement only' · 'flag every abstract claim that lacks a number' — the tool is excellent at single-error sweeps.</a:t>
+            </a:r>
+          </a:p>
+          <a:p>
+            <a:pPr algn="l">
+              <a:spcAft>
+                <a:spcPts val="1200"/>
+              </a:spcAft>
+            </a:pPr>
+            <a:r>
+              <a:rPr sz="1700">
+                <a:solidFill>
+                  <a:srgbClr val="8A6410"/>
+                </a:solidFill>
+                <a:latin typeface="Calibri"/>
+              </a:rPr>
+              <a:t>▪  </a:t>
+            </a:r>
+            <a:r>
+              <a:rPr sz="1700" b="1">
+                <a:solidFill>
+                  <a:srgbClr val="0E4D33"/>
+                </a:solidFill>
+                <a:latin typeface="Calibri"/>
+              </a:rPr>
+              <a:t>Verify its catches.  </a:t>
+            </a:r>
+            <a:r>
+              <a:rPr sz="1700" b="0" i="0">
+                <a:solidFill>
+                  <a:srgbClr val="212A26"/>
+                </a:solidFill>
+                <a:latin typeface="Calibri"/>
+              </a:rPr>
+              <a:t>AI flags phantom errors confidently; accept or reject each one deliberately, exactly as with a human reviewer.</a:t>
+            </a:r>
+          </a:p>
+          <a:p>
+            <a:pPr algn="l">
+              <a:spcAft>
+                <a:spcPts val="1200"/>
+              </a:spcAft>
+            </a:pPr>
+            <a:r>
+              <a:rPr sz="1700">
+                <a:solidFill>
+                  <a:srgbClr val="8A6410"/>
+                </a:solidFill>
+                <a:latin typeface="Calibri"/>
+              </a:rPr>
+              <a:t>▪  </a:t>
+            </a:r>
+            <a:r>
+              <a:rPr sz="1700" b="1">
+                <a:solidFill>
+                  <a:srgbClr val="0E4D33"/>
+                </a:solidFill>
+                <a:latin typeface="Calibri"/>
+              </a:rPr>
+              <a:t>Never paste what can't leak.  </a:t>
+            </a:r>
+            <a:r>
+              <a:rPr sz="1700" b="0" i="0">
+                <a:solidFill>
+                  <a:srgbClr val="212A26"/>
+                </a:solidFill>
+                <a:latin typeface="Calibri"/>
+              </a:rPr>
+              <a:t>Names, salaries, unreleased numbers — confidentiality rules apply to AI tools like any external service.</a:t>
+            </a:r>
+          </a:p>
+          <a:p>
+            <a:pPr algn="l">
+              <a:spcAft>
+                <a:spcPts val="1200"/>
+              </a:spcAft>
+            </a:pPr>
+            <a:r>
+              <a:rPr sz="1700">
+                <a:solidFill>
+                  <a:srgbClr val="8A6410"/>
+                </a:solidFill>
+                <a:latin typeface="Calibri"/>
+              </a:rPr>
+              <a:t>▪  </a:t>
+            </a:r>
+            <a:r>
+              <a:rPr sz="1700" b="1">
+                <a:solidFill>
+                  <a:srgbClr val="0E4D33"/>
+                </a:solidFill>
+                <a:latin typeface="Calibri"/>
+              </a:rPr>
+              <a:t>Your name ships on it.  </a:t>
+            </a:r>
+            <a:r>
+              <a:rPr sz="1700" b="0" i="0">
+                <a:solidFill>
+                  <a:srgbClr val="212A26"/>
+                </a:solidFill>
+                <a:latin typeface="Calibri"/>
+              </a:rPr>
+              <a:t>The judgment layer — tone, stakes, structure — stays yours (Chapter 15's rule).</a:t>
+            </a:r>
+          </a:p>
+        </p:txBody>
+      </p:sp>
+    </p:spTree>
+  </p:cSld>
+  <p:clrMapOvr>
+    <a:masterClrMapping/>
+  </p:clrMapOvr>
+</p:sld>
+</file>
+
+<file path=ppt/slides/slide27.xml><?xml version="1.0" encoding="utf-8"?>
+<p:sld xmlns:a="http://schemas.openxmlformats.org/drawingml/2006/main" xmlns:p="http://schemas.openxmlformats.org/presentationml/2006/main" xmlns:r="http://schemas.openxmlformats.org/officeDocument/2006/relationships">
+  <p:cSld>
+    <p:bg>
+      <p:bgPr>
+        <a:solidFill>
+          <a:srgbClr val="FFFFFF"/>
+        </a:solidFill>
+        <a:effectLst/>
+      </p:bgPr>
+    </p:bg>
+    <p:spTree>
+      <p:nvGrpSpPr>
+        <p:cNvPr id="1" name=""/>
+        <p:cNvGrpSpPr/>
+        <p:nvPr/>
+      </p:nvGrpSpPr>
+      <p:grpSpPr/>
+      <p:sp>
+        <p:nvSpPr>
+          <p:cNvPr id="2" name="Title 1" descr="Slide title: Case: the apology that needed one more pass"/>
+          <p:cNvSpPr>
+            <a:spLocks noGrp="1"/>
+          </p:cNvSpPr>
+          <p:nvPr>
+            <p:ph type="title"/>
+          </p:nvPr>
+        </p:nvSpPr>
+        <p:spPr>
+          <a:xfrm>
+            <a:off x="502920" y="411480"/>
+            <a:ext cx="11155680" cy="914400"/>
+          </a:xfrm>
+        </p:spPr>
+        <p:txBody>
+          <a:bodyPr wrap="square"/>
+          <a:lstStyle/>
+          <a:p>
+            <a:pPr algn="l"/>
+            <a:r>
+              <a:rPr sz="3200" b="1">
+                <a:solidFill>
+                  <a:srgbClr val="0E4D33"/>
+                </a:solidFill>
+                <a:latin typeface="Cambria"/>
+              </a:rPr>
+              <a:t>Case: the apology that needed one more pass</a:t>
+            </a:r>
+          </a:p>
+        </p:txBody>
+      </p:sp>
+      <p:sp>
+        <p:nvSpPr>
+          <p:cNvPr id="3" name="TextBox 2" descr="Footer: BADM 225 · Chapter 4"/>
+          <p:cNvSpPr txBox="1"/>
+          <p:nvPr/>
+        </p:nvSpPr>
+        <p:spPr>
+          <a:xfrm>
+            <a:off x="502920" y="6446520"/>
+            <a:ext cx="5486400" cy="320040"/>
+          </a:xfrm>
+          <a:prstGeom prst="rect">
+            <a:avLst/>
+          </a:prstGeom>
+          <a:noFill/>
+        </p:spPr>
+        <p:txBody>
+          <a:bodyPr wrap="none">
+            <a:spAutoFit/>
+          </a:bodyPr>
+          <a:lstStyle/>
+          <a:p>
+            <a:r>
+              <a:rPr sz="1000">
+                <a:solidFill>
+                  <a:srgbClr val="5E6B64"/>
+                </a:solidFill>
+                <a:latin typeface="Calibri"/>
+              </a:rPr>
+              <a:t>BADM 225 · Chapter 4</a:t>
+            </a:r>
+          </a:p>
+        </p:txBody>
+      </p:sp>
+      <p:sp>
+        <p:nvSpPr>
+          <p:cNvPr id="4" name="TextBox 3" descr="Slide number 27"/>
+          <p:cNvSpPr txBox="1"/>
+          <p:nvPr/>
+        </p:nvSpPr>
+        <p:spPr>
+          <a:xfrm>
+            <a:off x="11247120" y="6446520"/>
+            <a:ext cx="640080" cy="320040"/>
+          </a:xfrm>
+          <a:prstGeom prst="rect">
+            <a:avLst/>
+          </a:prstGeom>
+          <a:noFill/>
+        </p:spPr>
+        <p:txBody>
+          <a:bodyPr wrap="none">
+            <a:spAutoFit/>
+          </a:bodyPr>
+          <a:lstStyle/>
+          <a:p>
+            <a:pPr algn="r"/>
+            <a:r>
+              <a:rPr sz="1000">
+                <a:solidFill>
+                  <a:srgbClr val="5E6B64"/>
+                </a:solidFill>
+                <a:latin typeface="Calibri"/>
+              </a:rPr>
+              <a:t>27</a:t>
+            </a:r>
+          </a:p>
+        </p:txBody>
+      </p:sp>
+      <p:sp>
+        <p:nvSpPr>
+          <p:cNvPr id="5" name="TextBox 4" descr="Key points"/>
+          <p:cNvSpPr txBox="1"/>
+          <p:nvPr/>
+        </p:nvSpPr>
+        <p:spPr>
+          <a:xfrm>
+            <a:off x="548640" y="1554480"/>
+            <a:ext cx="11064240" cy="4663440"/>
+          </a:xfrm>
+          <a:prstGeom prst="rect">
+            <a:avLst/>
+          </a:prstGeom>
+          <a:noFill/>
+        </p:spPr>
+        <p:txBody>
+          <a:bodyPr wrap="square">
+            <a:spAutoFit/>
+          </a:bodyPr>
+          <a:lstStyle/>
+          <a:p>
+            <a:pPr algn="l">
+              <a:spcAft>
+                <a:spcPts val="1200"/>
+              </a:spcAft>
+            </a:pPr>
+            <a:r>
+              <a:rPr sz="1700">
+                <a:solidFill>
+                  <a:srgbClr val="8A6410"/>
+                </a:solidFill>
+                <a:latin typeface="Calibri"/>
+              </a:rPr>
+              <a:t>▪  </a:t>
+            </a:r>
+            <a:r>
+              <a:rPr sz="1700" b="1">
+                <a:solidFill>
+                  <a:srgbClr val="0E4D33"/>
+                </a:solidFill>
+                <a:latin typeface="Calibri"/>
+              </a:rPr>
+              <a:t>The draft was accurate:  </a:t>
+            </a:r>
+            <a:r>
+              <a:rPr sz="1700" b="0" i="0">
+                <a:solidFill>
+                  <a:srgbClr val="212A26"/>
+                </a:solidFill>
+                <a:latin typeface="Calibri"/>
+              </a:rPr>
+              <a:t>'We regret any inconvenience that may have been experienced as a result of the billing discrepancy.'</a:t>
+            </a:r>
+          </a:p>
+          <a:p>
+            <a:pPr algn="l">
+              <a:spcAft>
+                <a:spcPts val="1200"/>
+              </a:spcAft>
+            </a:pPr>
+            <a:r>
+              <a:rPr sz="1700">
+                <a:solidFill>
+                  <a:srgbClr val="8A6410"/>
+                </a:solidFill>
+                <a:latin typeface="Calibri"/>
+              </a:rPr>
+              <a:t>▪  </a:t>
+            </a:r>
+            <a:r>
+              <a:rPr sz="1700" b="1">
+                <a:solidFill>
+                  <a:srgbClr val="0E4D33"/>
+                </a:solidFill>
+                <a:latin typeface="Calibri"/>
+              </a:rPr>
+              <a:t>Every word defensible. Every word wrong.  </a:t>
+            </a:r>
+            <a:r>
+              <a:rPr sz="1700" b="0" i="0">
+                <a:solidFill>
+                  <a:srgbClr val="212A26"/>
+                </a:solidFill>
+                <a:latin typeface="Calibri"/>
+              </a:rPr>
+              <a:t>Passive, conditional, abstract — 'may have been experienced' implies the customer might be imagining it.</a:t>
+            </a:r>
+          </a:p>
+          <a:p>
+            <a:pPr algn="l">
+              <a:spcAft>
+                <a:spcPts val="1200"/>
+              </a:spcAft>
+            </a:pPr>
+            <a:r>
+              <a:rPr sz="1700">
+                <a:solidFill>
+                  <a:srgbClr val="8A6410"/>
+                </a:solidFill>
+                <a:latin typeface="Calibri"/>
+              </a:rPr>
+              <a:t>▪  </a:t>
+            </a:r>
+            <a:r>
+              <a:rPr sz="1700" b="1">
+                <a:solidFill>
+                  <a:srgbClr val="0E4D33"/>
+                </a:solidFill>
+                <a:latin typeface="Calibri"/>
+              </a:rPr>
+              <a:t>The tone-pass rewrite:  </a:t>
+            </a:r>
+            <a:r>
+              <a:rPr sz="1700" b="0" i="0">
+                <a:solidFill>
+                  <a:srgbClr val="212A26"/>
+                </a:solidFill>
+                <a:latin typeface="Calibri"/>
+              </a:rPr>
+              <a:t>'We billed you twice, and that's our error. The refund is processing today, and here's what we changed so it can't recur.'</a:t>
+            </a:r>
+          </a:p>
+          <a:p>
+            <a:pPr algn="l">
+              <a:spcAft>
+                <a:spcPts val="1200"/>
+              </a:spcAft>
+            </a:pPr>
+            <a:r>
+              <a:rPr sz="1700">
+                <a:solidFill>
+                  <a:srgbClr val="8A6410"/>
+                </a:solidFill>
+                <a:latin typeface="Calibri"/>
+              </a:rPr>
+              <a:t>▪  </a:t>
+            </a:r>
+            <a:r>
+              <a:rPr sz="1700" b="1">
+                <a:solidFill>
+                  <a:srgbClr val="0E4D33"/>
+                </a:solidFill>
+                <a:latin typeface="Calibri"/>
+              </a:rPr>
+              <a:t>The lesson:  </a:t>
+            </a:r>
+            <a:r>
+              <a:rPr sz="1700" b="0" i="0">
+                <a:solidFill>
+                  <a:srgbClr val="212A26"/>
+                </a:solidFill>
+                <a:latin typeface="Calibri"/>
+              </a:rPr>
+              <a:t>the six flab targets and the passive-as-camouflage habit aren't just style issues — under pressure, they read as evasion.</a:t>
+            </a:r>
+          </a:p>
+        </p:txBody>
+      </p:sp>
+    </p:spTree>
+  </p:cSld>
+  <p:clrMapOvr>
+    <a:masterClrMapping/>
+  </p:clrMapOvr>
+</p:sld>
+</file>
+
+<file path=ppt/slides/slide28.xml><?xml version="1.0" encoding="utf-8"?>
+<p:sld xmlns:a="http://schemas.openxmlformats.org/drawingml/2006/main" xmlns:p="http://schemas.openxmlformats.org/presentationml/2006/main" xmlns:r="http://schemas.openxmlformats.org/officeDocument/2006/relationships">
+  <p:cSld>
+    <p:bg>
+      <p:bgPr>
+        <a:solidFill>
+          <a:srgbClr val="FFFFFF"/>
+        </a:solidFill>
+        <a:effectLst/>
+      </p:bgPr>
+    </p:bg>
+    <p:spTree>
+      <p:nvGrpSpPr>
+        <p:cNvPr id="1" name=""/>
+        <p:cNvGrpSpPr/>
+        <p:nvPr/>
+      </p:nvGrpSpPr>
+      <p:grpSpPr/>
+      <p:sp>
+        <p:nvSpPr>
+          <p:cNvPr id="2" name="Title 1" descr="Slide title: Key takeaways"/>
+          <p:cNvSpPr>
+            <a:spLocks noGrp="1"/>
+          </p:cNvSpPr>
+          <p:nvPr>
+            <p:ph type="title"/>
+          </p:nvPr>
+        </p:nvSpPr>
+        <p:spPr>
+          <a:xfrm>
+            <a:off x="502920" y="411480"/>
+            <a:ext cx="11155680" cy="914400"/>
+          </a:xfrm>
+        </p:spPr>
+        <p:txBody>
+          <a:bodyPr wrap="square"/>
+          <a:lstStyle/>
+          <a:p>
+            <a:pPr algn="l"/>
+            <a:r>
+              <a:rPr sz="3200" b="1">
+                <a:solidFill>
+                  <a:srgbClr val="0E4D33"/>
+                </a:solidFill>
+                <a:latin typeface="Cambria"/>
+              </a:rPr>
+              <a:t>Key takeaways</a:t>
+            </a:r>
+          </a:p>
+        </p:txBody>
+      </p:sp>
+      <p:sp>
+        <p:nvSpPr>
+          <p:cNvPr id="3" name="TextBox 2" descr="Footer: BADM 225 · Chapter 4"/>
+          <p:cNvSpPr txBox="1"/>
+          <p:nvPr/>
+        </p:nvSpPr>
+        <p:spPr>
+          <a:xfrm>
+            <a:off x="502920" y="6446520"/>
+            <a:ext cx="5486400" cy="320040"/>
+          </a:xfrm>
+          <a:prstGeom prst="rect">
+            <a:avLst/>
+          </a:prstGeom>
+          <a:noFill/>
+        </p:spPr>
+        <p:txBody>
+          <a:bodyPr wrap="none">
+            <a:spAutoFit/>
+          </a:bodyPr>
+          <a:lstStyle/>
+          <a:p>
+            <a:r>
+              <a:rPr sz="1000">
+                <a:solidFill>
+                  <a:srgbClr val="5E6B64"/>
+                </a:solidFill>
+                <a:latin typeface="Calibri"/>
+              </a:rPr>
+              <a:t>BADM 225 · Chapter 4</a:t>
+            </a:r>
+          </a:p>
+        </p:txBody>
+      </p:sp>
+      <p:sp>
+        <p:nvSpPr>
+          <p:cNvPr id="4" name="TextBox 3" descr="Slide number 28"/>
+          <p:cNvSpPr txBox="1"/>
+          <p:nvPr/>
+        </p:nvSpPr>
+        <p:spPr>
+          <a:xfrm>
+            <a:off x="11247120" y="6446520"/>
+            <a:ext cx="640080" cy="320040"/>
+          </a:xfrm>
+          <a:prstGeom prst="rect">
+            <a:avLst/>
+          </a:prstGeom>
+          <a:noFill/>
+        </p:spPr>
+        <p:txBody>
+          <a:bodyPr wrap="none">
+            <a:spAutoFit/>
+          </a:bodyPr>
+          <a:lstStyle/>
+          <a:p>
+            <a:pPr algn="r"/>
+            <a:r>
+              <a:rPr sz="1000">
+                <a:solidFill>
+                  <a:srgbClr val="5E6B64"/>
+                </a:solidFill>
+                <a:latin typeface="Calibri"/>
+              </a:rPr>
+              <a:t>28</a:t>
+            </a:r>
+          </a:p>
+        </p:txBody>
+      </p:sp>
+      <p:sp>
+        <p:nvSpPr>
+          <p:cNvPr id="5" name="Oval 4" descr="Checkmark"/>
+          <p:cNvSpPr/>
+          <p:nvPr/>
+        </p:nvSpPr>
+        <p:spPr>
+          <a:xfrm>
+            <a:off x="640080" y="1572768"/>
+            <a:ext cx="420624" cy="420624"/>
+          </a:xfrm>
+          <a:prstGeom prst="ellipse">
+            <a:avLst/>
+          </a:prstGeom>
+          <a:solidFill>
+            <a:srgbClr val="0E4D33"/>
+          </a:solidFill>
+          <a:ln>
+            <a:noFill/>
+          </a:ln>
+          <a:effectLst/>
+        </p:spPr>
+        <p:style>
+          <a:lnRef idx="1">
+            <a:schemeClr val="accent1"/>
+          </a:lnRef>
+          <a:fillRef idx="3">
+            <a:schemeClr val="accent1"/>
+          </a:fillRef>
+          <a:effectRef idx="2">
+            <a:schemeClr val="accent1"/>
+          </a:effectRef>
+          <a:fontRef idx="minor">
+            <a:schemeClr val="lt1"/>
+          </a:fontRef>
+        </p:style>
+        <p:txBody>
+          <a:bodyPr rtlCol="0" anchor="ctr" lIns="0" rIns="0" tIns="0" bIns="0"/>
+          <a:lstStyle/>
+          <a:p>
+            <a:pPr algn="ctr"/>
+            <a:r>
+              <a:rPr sz="1100" b="1">
+                <a:solidFill>
+                  <a:srgbClr val="FFFFFF"/>
+                </a:solidFill>
+                <a:latin typeface="Calibri"/>
+              </a:rPr>
+              <a:t>✓</a:t>
+            </a:r>
+          </a:p>
+        </p:txBody>
+      </p:sp>
+      <p:sp>
+        <p:nvSpPr>
+          <p:cNvPr id="6" name="TextBox 5" descr="Takeaway 1"/>
+          <p:cNvSpPr txBox="1"/>
+          <p:nvPr/>
+        </p:nvSpPr>
+        <p:spPr>
+          <a:xfrm>
+            <a:off x="1325880" y="1554480"/>
+            <a:ext cx="10332720" cy="640080"/>
+          </a:xfrm>
+          <a:prstGeom prst="rect">
+            <a:avLst/>
+          </a:prstGeom>
+          <a:noFill/>
+        </p:spPr>
+        <p:txBody>
+          <a:bodyPr wrap="square">
+            <a:spAutoFit/>
+          </a:bodyPr>
+          <a:lstStyle/>
+          <a:p>
+            <a:pPr algn="l">
+              <a:spcAft>
+                <a:spcPts val="800"/>
+              </a:spcAft>
+            </a:pPr>
+            <a:r>
+              <a:rPr sz="1550" b="0" i="0">
+                <a:solidFill>
+                  <a:srgbClr val="212A26"/>
+                </a:solidFill>
+                <a:latin typeface="Calibri"/>
+              </a:rPr>
+              <a:t>Three passes at three altitudes: structure, sentences, proof — never one anxious reread.</a:t>
+            </a:r>
+          </a:p>
+        </p:txBody>
+      </p:sp>
+      <p:sp>
+        <p:nvSpPr>
+          <p:cNvPr id="7" name="Oval 6" descr="Checkmark"/>
+          <p:cNvSpPr/>
+          <p:nvPr/>
+        </p:nvSpPr>
+        <p:spPr>
+          <a:xfrm>
+            <a:off x="640080" y="2212848"/>
+            <a:ext cx="420624" cy="420624"/>
+          </a:xfrm>
+          <a:prstGeom prst="ellipse">
+            <a:avLst/>
+          </a:prstGeom>
+          <a:solidFill>
+            <a:srgbClr val="0E4D33"/>
+          </a:solidFill>
+          <a:ln>
+            <a:noFill/>
+          </a:ln>
+          <a:effectLst/>
+        </p:spPr>
+        <p:style>
+          <a:lnRef idx="1">
+            <a:schemeClr val="accent1"/>
+          </a:lnRef>
+          <a:fillRef idx="3">
+            <a:schemeClr val="accent1"/>
+          </a:fillRef>
+          <a:effectRef idx="2">
+            <a:schemeClr val="accent1"/>
+          </a:effectRef>
+          <a:fontRef idx="minor">
+            <a:schemeClr val="lt1"/>
+          </a:fontRef>
+        </p:style>
+        <p:txBody>
+          <a:bodyPr rtlCol="0" anchor="ctr" lIns="0" rIns="0" tIns="0" bIns="0"/>
+          <a:lstStyle/>
+          <a:p>
+            <a:pPr algn="ctr"/>
+            <a:r>
+              <a:rPr sz="1100" b="1">
+                <a:solidFill>
+                  <a:srgbClr val="FFFFFF"/>
+                </a:solidFill>
+                <a:latin typeface="Calibri"/>
+              </a:rPr>
+              <a:t>✓</a:t>
+            </a:r>
+          </a:p>
+        </p:txBody>
+      </p:sp>
+      <p:sp>
+        <p:nvSpPr>
+          <p:cNvPr id="8" name="TextBox 7" descr="Takeaway 2"/>
+          <p:cNvSpPr txBox="1"/>
+          <p:nvPr/>
+        </p:nvSpPr>
+        <p:spPr>
+          <a:xfrm>
+            <a:off x="1325880" y="2194560"/>
+            <a:ext cx="10332720" cy="640080"/>
+          </a:xfrm>
+          <a:prstGeom prst="rect">
+            <a:avLst/>
+          </a:prstGeom>
+          <a:noFill/>
+        </p:spPr>
+        <p:txBody>
+          <a:bodyPr wrap="square">
+            <a:spAutoFit/>
+          </a:bodyPr>
+          <a:lstStyle/>
+          <a:p>
+            <a:pPr algn="l">
+              <a:spcAft>
+                <a:spcPts val="800"/>
+              </a:spcAft>
+            </a:pPr>
+            <a:r>
+              <a:rPr sz="1550" b="0" i="0">
+                <a:solidFill>
+                  <a:srgbClr val="212A26"/>
+                </a:solidFill>
+                <a:latin typeface="Calibri"/>
+              </a:rPr>
+              <a:t>Cool the draft; distance converts the writer back into a reader.</a:t>
+            </a:r>
+          </a:p>
+        </p:txBody>
+      </p:sp>
+      <p:sp>
+        <p:nvSpPr>
+          <p:cNvPr id="9" name="Oval 8" descr="Checkmark"/>
+          <p:cNvSpPr/>
+          <p:nvPr/>
+        </p:nvSpPr>
+        <p:spPr>
+          <a:xfrm>
+            <a:off x="640080" y="2852928"/>
+            <a:ext cx="420624" cy="420624"/>
+          </a:xfrm>
+          <a:prstGeom prst="ellipse">
+            <a:avLst/>
+          </a:prstGeom>
+          <a:solidFill>
+            <a:srgbClr val="0E4D33"/>
+          </a:solidFill>
+          <a:ln>
+            <a:noFill/>
+          </a:ln>
+          <a:effectLst/>
+        </p:spPr>
+        <p:style>
+          <a:lnRef idx="1">
+            <a:schemeClr val="accent1"/>
+          </a:lnRef>
+          <a:fillRef idx="3">
+            <a:schemeClr val="accent1"/>
+          </a:fillRef>
+          <a:effectRef idx="2">
+            <a:schemeClr val="accent1"/>
+          </a:effectRef>
+          <a:fontRef idx="minor">
+            <a:schemeClr val="lt1"/>
+          </a:fontRef>
+        </p:style>
+        <p:txBody>
+          <a:bodyPr rtlCol="0" anchor="ctr" lIns="0" rIns="0" tIns="0" bIns="0"/>
+          <a:lstStyle/>
+          <a:p>
+            <a:pPr algn="ctr"/>
+            <a:r>
+              <a:rPr sz="1100" b="1">
+                <a:solidFill>
+                  <a:srgbClr val="FFFFFF"/>
+                </a:solidFill>
+                <a:latin typeface="Calibri"/>
+              </a:rPr>
+              <a:t>✓</a:t>
+            </a:r>
+          </a:p>
+        </p:txBody>
+      </p:sp>
+      <p:sp>
+        <p:nvSpPr>
+          <p:cNvPr id="10" name="TextBox 9" descr="Takeaway 3"/>
+          <p:cNvSpPr txBox="1"/>
+          <p:nvPr/>
+        </p:nvSpPr>
+        <p:spPr>
+          <a:xfrm>
+            <a:off x="1325880" y="2834640"/>
+            <a:ext cx="10332720" cy="640080"/>
+          </a:xfrm>
+          <a:prstGeom prst="rect">
+            <a:avLst/>
+          </a:prstGeom>
+          <a:noFill/>
+        </p:spPr>
+        <p:txBody>
+          <a:bodyPr wrap="square">
+            <a:spAutoFit/>
+          </a:bodyPr>
+          <a:lstStyle/>
+          <a:p>
+            <a:pPr algn="l">
+              <a:spcAft>
+                <a:spcPts val="800"/>
+              </a:spcAft>
+            </a:pPr>
+            <a:r>
+              <a:rPr sz="1550" b="0" i="0">
+                <a:solidFill>
+                  <a:srgbClr val="212A26"/>
+                </a:solidFill>
+                <a:latin typeface="Calibri"/>
+              </a:rPr>
+              <a:t>Cut the six flab targets on sight; omit needless words.</a:t>
+            </a:r>
+          </a:p>
+        </p:txBody>
+      </p:sp>
+      <p:sp>
+        <p:nvSpPr>
+          <p:cNvPr id="11" name="Oval 10" descr="Checkmark"/>
+          <p:cNvSpPr/>
+          <p:nvPr/>
+        </p:nvSpPr>
+        <p:spPr>
+          <a:xfrm>
+            <a:off x="640080" y="3493008"/>
+            <a:ext cx="420624" cy="420624"/>
+          </a:xfrm>
+          <a:prstGeom prst="ellipse">
+            <a:avLst/>
+          </a:prstGeom>
+          <a:solidFill>
+            <a:srgbClr val="0E4D33"/>
+          </a:solidFill>
+          <a:ln>
+            <a:noFill/>
+          </a:ln>
+          <a:effectLst/>
+        </p:spPr>
+        <p:style>
+          <a:lnRef idx="1">
+            <a:schemeClr val="accent1"/>
+          </a:lnRef>
+          <a:fillRef idx="3">
+            <a:schemeClr val="accent1"/>
+          </a:fillRef>
+          <a:effectRef idx="2">
+            <a:schemeClr val="accent1"/>
+          </a:effectRef>
+          <a:fontRef idx="minor">
+            <a:schemeClr val="lt1"/>
+          </a:fontRef>
+        </p:style>
+        <p:txBody>
+          <a:bodyPr rtlCol="0" anchor="ctr" lIns="0" rIns="0" tIns="0" bIns="0"/>
+          <a:lstStyle/>
+          <a:p>
+            <a:pPr algn="ctr"/>
+            <a:r>
+              <a:rPr sz="1100" b="1">
+                <a:solidFill>
+                  <a:srgbClr val="FFFFFF"/>
+                </a:solidFill>
+                <a:latin typeface="Calibri"/>
+              </a:rPr>
+              <a:t>✓</a:t>
+            </a:r>
+          </a:p>
+        </p:txBody>
+      </p:sp>
+      <p:sp>
+        <p:nvSpPr>
+          <p:cNvPr id="12" name="TextBox 11" descr="Takeaway 4"/>
+          <p:cNvSpPr txBox="1"/>
+          <p:nvPr/>
+        </p:nvSpPr>
+        <p:spPr>
+          <a:xfrm>
+            <a:off x="1325880" y="3474720"/>
+            <a:ext cx="10332720" cy="640080"/>
+          </a:xfrm>
+          <a:prstGeom prst="rect">
+            <a:avLst/>
+          </a:prstGeom>
+          <a:noFill/>
+        </p:spPr>
+        <p:txBody>
+          <a:bodyPr wrap="square">
+            <a:spAutoFit/>
+          </a:bodyPr>
+          <a:lstStyle/>
+          <a:p>
+            <a:pPr algn="l">
+              <a:spcAft>
+                <a:spcPts val="800"/>
+              </a:spcAft>
+            </a:pPr>
+            <a:r>
+              <a:rPr sz="1550" b="0" i="0">
+                <a:solidFill>
+                  <a:srgbClr val="212A26"/>
+                </a:solidFill>
+                <a:latin typeface="Calibri"/>
+              </a:rPr>
+              <a:t>Climb down the abstraction ladder until claims are checkable.</a:t>
+            </a:r>
+          </a:p>
+        </p:txBody>
+      </p:sp>
+      <p:sp>
+        <p:nvSpPr>
+          <p:cNvPr id="13" name="Oval 12" descr="Checkmark"/>
+          <p:cNvSpPr/>
+          <p:nvPr/>
+        </p:nvSpPr>
+        <p:spPr>
+          <a:xfrm>
+            <a:off x="640080" y="4133088"/>
+            <a:ext cx="420624" cy="420624"/>
+          </a:xfrm>
+          <a:prstGeom prst="ellipse">
+            <a:avLst/>
+          </a:prstGeom>
+          <a:solidFill>
+            <a:srgbClr val="0E4D33"/>
+          </a:solidFill>
+          <a:ln>
+            <a:noFill/>
+          </a:ln>
+          <a:effectLst/>
+        </p:spPr>
+        <p:style>
+          <a:lnRef idx="1">
+            <a:schemeClr val="accent1"/>
+          </a:lnRef>
+          <a:fillRef idx="3">
+            <a:schemeClr val="accent1"/>
+          </a:fillRef>
+          <a:effectRef idx="2">
+            <a:schemeClr val="accent1"/>
+          </a:effectRef>
+          <a:fontRef idx="minor">
+            <a:schemeClr val="lt1"/>
+          </a:fontRef>
+        </p:style>
+        <p:txBody>
+          <a:bodyPr rtlCol="0" anchor="ctr" lIns="0" rIns="0" tIns="0" bIns="0"/>
+          <a:lstStyle/>
+          <a:p>
+            <a:pPr algn="ctr"/>
+            <a:r>
+              <a:rPr sz="1100" b="1">
+                <a:solidFill>
+                  <a:srgbClr val="FFFFFF"/>
+                </a:solidFill>
+                <a:latin typeface="Calibri"/>
+              </a:rPr>
+              <a:t>✓</a:t>
+            </a:r>
+          </a:p>
+        </p:txBody>
+      </p:sp>
+      <p:sp>
+        <p:nvSpPr>
+          <p:cNvPr id="14" name="TextBox 13" descr="Takeaway 5"/>
+          <p:cNvSpPr txBox="1"/>
+          <p:nvPr/>
+        </p:nvSpPr>
+        <p:spPr>
+          <a:xfrm>
+            <a:off x="1325880" y="4114800"/>
+            <a:ext cx="10332720" cy="640080"/>
+          </a:xfrm>
+          <a:prstGeom prst="rect">
+            <a:avLst/>
+          </a:prstGeom>
+          <a:noFill/>
+        </p:spPr>
+        <p:txBody>
+          <a:bodyPr wrap="square">
+            <a:spAutoFit/>
+          </a:bodyPr>
+          <a:lstStyle/>
+          <a:p>
+            <a:pPr algn="l">
+              <a:spcAft>
+                <a:spcPts val="800"/>
+              </a:spcAft>
+            </a:pPr>
+            <a:r>
+              <a:rPr sz="1550" b="0" i="0">
+                <a:solidFill>
+                  <a:srgbClr val="212A26"/>
+                </a:solidFill>
+                <a:latin typeface="Calibri"/>
+              </a:rPr>
+              <a:t>Verify names, numbers, and dates against sources — spellcheck cannot see the high-stakes errors.</a:t>
+            </a:r>
+          </a:p>
+        </p:txBody>
+      </p:sp>
+      <p:sp>
+        <p:nvSpPr>
+          <p:cNvPr id="15" name="Oval 14" descr="Checkmark"/>
+          <p:cNvSpPr/>
+          <p:nvPr/>
+        </p:nvSpPr>
+        <p:spPr>
+          <a:xfrm>
+            <a:off x="640080" y="4773168"/>
+            <a:ext cx="420624" cy="420624"/>
+          </a:xfrm>
+          <a:prstGeom prst="ellipse">
+            <a:avLst/>
+          </a:prstGeom>
+          <a:solidFill>
+            <a:srgbClr val="0E4D33"/>
+          </a:solidFill>
+          <a:ln>
+            <a:noFill/>
+          </a:ln>
+          <a:effectLst/>
+        </p:spPr>
+        <p:style>
+          <a:lnRef idx="1">
+            <a:schemeClr val="accent1"/>
+          </a:lnRef>
+          <a:fillRef idx="3">
+            <a:schemeClr val="accent1"/>
+          </a:fillRef>
+          <a:effectRef idx="2">
+            <a:schemeClr val="accent1"/>
+          </a:effectRef>
+          <a:fontRef idx="minor">
+            <a:schemeClr val="lt1"/>
+          </a:fontRef>
+        </p:style>
+        <p:txBody>
+          <a:bodyPr rtlCol="0" anchor="ctr" lIns="0" rIns="0" tIns="0" bIns="0"/>
+          <a:lstStyle/>
+          <a:p>
+            <a:pPr algn="ctr"/>
+            <a:r>
+              <a:rPr sz="1100" b="1">
+                <a:solidFill>
+                  <a:srgbClr val="FFFFFF"/>
+                </a:solidFill>
+                <a:latin typeface="Calibri"/>
+              </a:rPr>
+              <a:t>✓</a:t>
+            </a:r>
+          </a:p>
+        </p:txBody>
+      </p:sp>
+      <p:sp>
+        <p:nvSpPr>
+          <p:cNvPr id="16" name="TextBox 15" descr="Takeaway 6"/>
+          <p:cNvSpPr txBox="1"/>
+          <p:nvPr/>
+        </p:nvSpPr>
+        <p:spPr>
+          <a:xfrm>
+            <a:off x="1325880" y="4754880"/>
+            <a:ext cx="10332720" cy="640080"/>
+          </a:xfrm>
+          <a:prstGeom prst="rect">
+            <a:avLst/>
+          </a:prstGeom>
+          <a:noFill/>
+        </p:spPr>
+        <p:txBody>
+          <a:bodyPr wrap="square">
+            <a:spAutoFit/>
+          </a:bodyPr>
+          <a:lstStyle/>
+          <a:p>
+            <a:pPr algn="l">
+              <a:spcAft>
+                <a:spcPts val="800"/>
+              </a:spcAft>
+            </a:pPr>
+            <a:r>
+              <a:rPr sz="1550" b="0" i="0">
+                <a:solidFill>
+                  <a:srgbClr val="212A26"/>
+                </a:solidFill>
+                <a:latin typeface="Calibri"/>
+              </a:rPr>
+              <a:t>The last-thing check (subject · recipients · attachment) prevents what perfect prose cannot.</a:t>
+            </a:r>
+          </a:p>
+        </p:txBody>
+      </p:sp>
+      <p:sp>
+        <p:nvSpPr>
+          <p:cNvPr id="17" name="Rounded Rectangle 16" descr="Practice reminder"/>
+          <p:cNvSpPr/>
+          <p:nvPr/>
+        </p:nvSpPr>
+        <p:spPr>
+          <a:xfrm>
+            <a:off x="548640" y="5468112"/>
+            <a:ext cx="10424160" cy="685800"/>
+          </a:xfrm>
+          <a:prstGeom prst="roundRect">
+            <a:avLst/>
+          </a:prstGeom>
+          <a:solidFill>
+            <a:srgbClr val="0E4D33"/>
+          </a:solidFill>
+          <a:ln>
+            <a:noFill/>
+          </a:ln>
+          <a:effectLst/>
+        </p:spPr>
+        <p:style>
+          <a:lnRef idx="1">
+            <a:schemeClr val="accent1"/>
+          </a:lnRef>
+          <a:fillRef idx="3">
+            <a:schemeClr val="accent1"/>
+          </a:fillRef>
+          <a:effectRef idx="2">
+            <a:schemeClr val="accent1"/>
+          </a:effectRef>
+          <a:fontRef idx="minor">
+            <a:schemeClr val="lt1"/>
+          </a:fontRef>
+        </p:style>
+        <p:txBody>
+          <a:bodyPr rtlCol="0" anchor="t" wrap="square" lIns="164592" rIns="164592" tIns="128016" bIns="109728"/>
+          <a:lstStyle/>
+          <a:p>
+            <a:pPr algn="l">
+              <a:spcAft>
+                <a:spcPts val="0"/>
+              </a:spcAft>
+            </a:pPr>
+            <a:r>
+              <a:rPr sz="1450" b="1" i="0">
+                <a:solidFill>
+                  <a:srgbClr val="FFFFFF"/>
+                </a:solidFill>
+                <a:latin typeface="Calibri"/>
+              </a:rPr>
+              <a:t>Practice now: course site → Chapter 4 → Practice, then the graded homework before the weekly deadline.</a:t>
+            </a:r>
+          </a:p>
+        </p:txBody>
+      </p:sp>
+    </p:spTree>
+  </p:cSld>
+  <p:clrMapOvr>
+    <a:masterClrMapping/>
+  </p:clrMapOvr>
+</p:sld>
+</file>
+
+<file path=ppt/slides/slide29.xml><?xml version="1.0" encoding="utf-8"?>
+<p:sld xmlns:a="http://schemas.openxmlformats.org/drawingml/2006/main" xmlns:p="http://schemas.openxmlformats.org/presentationml/2006/main" xmlns:r="http://schemas.openxmlformats.org/officeDocument/2006/relationships">
+  <p:cSld>
+    <p:bg>
+      <p:bgPr>
+        <a:solidFill>
+          <a:srgbClr val="EAF1EB"/>
+        </a:solidFill>
+        <a:effectLst/>
+      </p:bgPr>
+    </p:bg>
+    <p:spTree>
+      <p:nvGrpSpPr>
+        <p:cNvPr id="1" name=""/>
+        <p:cNvGrpSpPr/>
+        <p:nvPr/>
+      </p:nvGrpSpPr>
+      <p:grpSpPr/>
+      <p:sp>
+        <p:nvSpPr>
+          <p:cNvPr id="2" name="Title 1" descr="Slide title: Worth keeping"/>
+          <p:cNvSpPr>
+            <a:spLocks noGrp="1"/>
+          </p:cNvSpPr>
+          <p:nvPr>
+            <p:ph type="title"/>
+          </p:nvPr>
+        </p:nvSpPr>
+        <p:spPr>
+          <a:xfrm>
+            <a:off x="502920" y="411480"/>
+            <a:ext cx="11155680" cy="914400"/>
+          </a:xfrm>
+        </p:spPr>
+        <p:txBody>
+          <a:bodyPr wrap="square"/>
+          <a:lstStyle/>
+          <a:p>
+            <a:pPr algn="l"/>
+            <a:r>
+              <a:rPr sz="3400" b="1">
+                <a:solidFill>
+                  <a:srgbClr val="0E4D33"/>
+                </a:solidFill>
+                <a:latin typeface="Cambria"/>
+              </a:rPr>
+              <a:t>Worth keeping</a:t>
+            </a:r>
+          </a:p>
+        </p:txBody>
+      </p:sp>
+      <p:sp>
+        <p:nvSpPr>
+          <p:cNvPr id="3" name="TextBox 2" descr="Quotation"/>
+          <p:cNvSpPr txBox="1"/>
+          <p:nvPr/>
+        </p:nvSpPr>
+        <p:spPr>
+          <a:xfrm>
+            <a:off x="1280160" y="2194560"/>
+            <a:ext cx="9601200" cy="2377440"/>
+          </a:xfrm>
+          <a:prstGeom prst="rect">
+            <a:avLst/>
+          </a:prstGeom>
+          <a:noFill/>
+        </p:spPr>
+        <p:txBody>
+          <a:bodyPr wrap="square">
+            <a:spAutoFit/>
+          </a:bodyPr>
+          <a:lstStyle/>
+          <a:p>
+            <a:pPr algn="l">
+              <a:spcAft>
+                <a:spcPts val="800"/>
+              </a:spcAft>
+            </a:pPr>
+            <a:r>
+              <a:rPr sz="2700" b="0" i="1">
+                <a:solidFill>
+                  <a:srgbClr val="212A26"/>
+                </a:solidFill>
+                <a:latin typeface="Cambria"/>
+              </a:rPr>
+              <a:t>“Errors are the one writing flaw every reader can see. Revision is how professionals make sure the flaw they show the world is never that one.”</a:t>
+            </a:r>
+          </a:p>
+        </p:txBody>
+      </p:sp>
+      <p:sp>
+        <p:nvSpPr>
+          <p:cNvPr id="4" name="TextBox 3" descr="Attribution"/>
+          <p:cNvSpPr txBox="1"/>
+          <p:nvPr/>
+        </p:nvSpPr>
+        <p:spPr>
+          <a:xfrm>
+            <a:off x="1280160" y="4754880"/>
+            <a:ext cx="9601200" cy="548640"/>
+          </a:xfrm>
+          <a:prstGeom prst="rect">
+            <a:avLst/>
+          </a:prstGeom>
+          <a:noFill/>
+        </p:spPr>
+        <p:txBody>
+          <a:bodyPr wrap="square">
+            <a:spAutoFit/>
+          </a:bodyPr>
+          <a:lstStyle/>
+          <a:p>
+            <a:pPr algn="l">
+              <a:spcAft>
+                <a:spcPts val="800"/>
+              </a:spcAft>
+            </a:pPr>
+            <a:r>
+              <a:rPr sz="1600" b="0" i="0">
+                <a:solidFill>
+                  <a:srgbClr val="5E6B64"/>
+                </a:solidFill>
+                <a:latin typeface="Calibri"/>
+              </a:rPr>
+              <a:t>— this chapter, compressed</a:t>
+            </a:r>
+          </a:p>
+        </p:txBody>
+      </p:sp>
+      <p:sp>
+        <p:nvSpPr>
+          <p:cNvPr id="5" name="TextBox 4" descr="Footer: BADM 225 · Chapter 4"/>
+          <p:cNvSpPr txBox="1"/>
+          <p:nvPr/>
+        </p:nvSpPr>
+        <p:spPr>
+          <a:xfrm>
+            <a:off x="502920" y="6446520"/>
+            <a:ext cx="5486400" cy="320040"/>
+          </a:xfrm>
+          <a:prstGeom prst="rect">
+            <a:avLst/>
+          </a:prstGeom>
+          <a:noFill/>
+        </p:spPr>
+        <p:txBody>
+          <a:bodyPr wrap="none">
+            <a:spAutoFit/>
+          </a:bodyPr>
+          <a:lstStyle/>
+          <a:p>
+            <a:r>
+              <a:rPr sz="1000">
+                <a:solidFill>
+                  <a:srgbClr val="5E6B64"/>
+                </a:solidFill>
+                <a:latin typeface="Calibri"/>
+              </a:rPr>
+              <a:t>BADM 225 · Chapter 4</a:t>
+            </a:r>
+          </a:p>
+        </p:txBody>
+      </p:sp>
+      <p:sp>
+        <p:nvSpPr>
+          <p:cNvPr id="6" name="TextBox 5" descr="Slide number 29"/>
+          <p:cNvSpPr txBox="1"/>
+          <p:nvPr/>
+        </p:nvSpPr>
+        <p:spPr>
+          <a:xfrm>
+            <a:off x="11247120" y="6446520"/>
+            <a:ext cx="640080" cy="320040"/>
+          </a:xfrm>
+          <a:prstGeom prst="rect">
+            <a:avLst/>
+          </a:prstGeom>
+          <a:noFill/>
+        </p:spPr>
+        <p:txBody>
+          <a:bodyPr wrap="none">
+            <a:spAutoFit/>
+          </a:bodyPr>
+          <a:lstStyle/>
+          <a:p>
+            <a:pPr algn="r"/>
+            <a:r>
+              <a:rPr sz="1000">
+                <a:solidFill>
+                  <a:srgbClr val="5E6B64"/>
+                </a:solidFill>
+                <a:latin typeface="Calibri"/>
+              </a:rPr>
+              <a:t>29</a:t>
             </a:r>
           </a:p>
         </p:txBody>
@@ -10571,6 +13712,568 @@
                 <a:latin typeface="Calibri"/>
               </a:rPr>
               <a:t>3</a:t>
+            </a:r>
+          </a:p>
+        </p:txBody>
+      </p:sp>
+    </p:spTree>
+  </p:cSld>
+  <p:clrMapOvr>
+    <a:masterClrMapping/>
+  </p:clrMapOvr>
+</p:sld>
+</file>
+
+<file path=ppt/slides/slide30.xml><?xml version="1.0" encoding="utf-8"?>
+<p:sld xmlns:a="http://schemas.openxmlformats.org/drawingml/2006/main" xmlns:p="http://schemas.openxmlformats.org/presentationml/2006/main" xmlns:r="http://schemas.openxmlformats.org/officeDocument/2006/relationships">
+  <p:cSld>
+    <p:bg>
+      <p:bgPr>
+        <a:solidFill>
+          <a:srgbClr val="0E4D33"/>
+        </a:solidFill>
+        <a:effectLst/>
+      </p:bgPr>
+    </p:bg>
+    <p:spTree>
+      <p:nvGrpSpPr>
+        <p:cNvPr id="1" name=""/>
+        <p:cNvGrpSpPr/>
+        <p:nvPr/>
+      </p:nvGrpSpPr>
+      <p:grpSpPr/>
+      <p:sp>
+        <p:nvSpPr>
+          <p:cNvPr id="2" name="Title 1" descr="Slide title: Discussion questions"/>
+          <p:cNvSpPr>
+            <a:spLocks noGrp="1"/>
+          </p:cNvSpPr>
+          <p:nvPr>
+            <p:ph type="title"/>
+          </p:nvPr>
+        </p:nvSpPr>
+        <p:spPr>
+          <a:xfrm>
+            <a:off x="502920" y="411480"/>
+            <a:ext cx="11155680" cy="914400"/>
+          </a:xfrm>
+        </p:spPr>
+        <p:txBody>
+          <a:bodyPr wrap="square"/>
+          <a:lstStyle/>
+          <a:p>
+            <a:pPr algn="l"/>
+            <a:r>
+              <a:rPr sz="3400" b="1">
+                <a:solidFill>
+                  <a:srgbClr val="FFFFFF"/>
+                </a:solidFill>
+                <a:latin typeface="Cambria"/>
+              </a:rPr>
+              <a:t>Discussion questions</a:t>
+            </a:r>
+          </a:p>
+        </p:txBody>
+      </p:sp>
+      <p:sp>
+        <p:nvSpPr>
+          <p:cNvPr id="3" name="TextBox 2" descr="Discussion questions"/>
+          <p:cNvSpPr txBox="1"/>
+          <p:nvPr/>
+        </p:nvSpPr>
+        <p:spPr>
+          <a:xfrm>
+            <a:off x="731520" y="1737360"/>
+            <a:ext cx="10698480" cy="4480560"/>
+          </a:xfrm>
+          <a:prstGeom prst="rect">
+            <a:avLst/>
+          </a:prstGeom>
+          <a:noFill/>
+        </p:spPr>
+        <p:txBody>
+          <a:bodyPr wrap="square">
+            <a:spAutoFit/>
+          </a:bodyPr>
+          <a:lstStyle/>
+          <a:p>
+            <a:pPr algn="l">
+              <a:spcAft>
+                <a:spcPts val="1800"/>
+              </a:spcAft>
+            </a:pPr>
+            <a:r>
+              <a:rPr sz="1800" b="1">
+                <a:solidFill>
+                  <a:srgbClr val="C9931A"/>
+                </a:solidFill>
+                <a:latin typeface="Calibri"/>
+              </a:rPr>
+              <a:t>1.  </a:t>
+            </a:r>
+            <a:r>
+              <a:rPr sz="1800" b="0" i="0">
+                <a:solidFill>
+                  <a:srgbClr val="FFFFFF"/>
+                </a:solidFill>
+                <a:latin typeface="Calibri"/>
+              </a:rPr>
+              <a:t>Which flab target is your signature? Bring three examples from your own writing, repaired.</a:t>
+            </a:r>
+          </a:p>
+          <a:p>
+            <a:pPr algn="l">
+              <a:spcAft>
+                <a:spcPts val="1800"/>
+              </a:spcAft>
+            </a:pPr>
+            <a:r>
+              <a:rPr sz="1800" b="1">
+                <a:solidFill>
+                  <a:srgbClr val="C9931A"/>
+                </a:solidFill>
+                <a:latin typeface="Calibri"/>
+              </a:rPr>
+              <a:t>2.  </a:t>
+            </a:r>
+            <a:r>
+              <a:rPr sz="1800" b="0" i="0">
+                <a:solidFill>
+                  <a:srgbClr val="FFFFFF"/>
+                </a:solidFill>
+                <a:latin typeface="Calibri"/>
+              </a:rPr>
+              <a:t>Where can a cooling period realistically live in your workflow — and for which documents is it non-negotiable?</a:t>
+            </a:r>
+          </a:p>
+          <a:p>
+            <a:pPr algn="l">
+              <a:spcAft>
+                <a:spcPts val="1800"/>
+              </a:spcAft>
+            </a:pPr>
+            <a:r>
+              <a:rPr sz="1800" b="1">
+                <a:solidFill>
+                  <a:srgbClr val="C9931A"/>
+                </a:solidFill>
+                <a:latin typeface="Calibri"/>
+              </a:rPr>
+              <a:t>3.  </a:t>
+            </a:r>
+            <a:r>
+              <a:rPr sz="1800" b="0" i="0">
+                <a:solidFill>
+                  <a:srgbClr val="FFFFFF"/>
+                </a:solidFill>
+                <a:latin typeface="Calibri"/>
+              </a:rPr>
+              <a:t>Find a public sentence whose ambiguity could cost money. Rewrite it so no second reading exists.</a:t>
+            </a:r>
+          </a:p>
+          <a:p>
+            <a:pPr algn="l">
+              <a:spcAft>
+                <a:spcPts val="1800"/>
+              </a:spcAft>
+            </a:pPr>
+            <a:r>
+              <a:rPr sz="1800" b="1">
+                <a:solidFill>
+                  <a:srgbClr val="C9931A"/>
+                </a:solidFill>
+                <a:latin typeface="Calibri"/>
+              </a:rPr>
+              <a:t>4.  </a:t>
+            </a:r>
+            <a:r>
+              <a:rPr sz="1800" b="0" i="0">
+                <a:solidFill>
+                  <a:srgbClr val="FFFFFF"/>
+                </a:solidFill>
+                <a:latin typeface="Calibri"/>
+              </a:rPr>
+              <a:t>Automated tools pass all ten workshop sentences. What does that say about you versus your tools?</a:t>
+            </a:r>
+          </a:p>
+          <a:p>
+            <a:pPr algn="l">
+              <a:spcAft>
+                <a:spcPts val="1800"/>
+              </a:spcAft>
+            </a:pPr>
+            <a:r>
+              <a:rPr sz="1800" b="1">
+                <a:solidFill>
+                  <a:srgbClr val="C9931A"/>
+                </a:solidFill>
+                <a:latin typeface="Calibri"/>
+              </a:rPr>
+              <a:t>5.  </a:t>
+            </a:r>
+            <a:r>
+              <a:rPr sz="1800" b="0" i="0">
+                <a:solidFill>
+                  <a:srgbClr val="FFFFFF"/>
+                </a:solidFill>
+                <a:latin typeface="Calibri"/>
+              </a:rPr>
+              <a:t>Defend or attack: the serial comma should be mandatory in business writing.</a:t>
+            </a:r>
+          </a:p>
+        </p:txBody>
+      </p:sp>
+      <p:sp>
+        <p:nvSpPr>
+          <p:cNvPr id="4" name="TextBox 3" descr="Footer"/>
+          <p:cNvSpPr txBox="1"/>
+          <p:nvPr/>
+        </p:nvSpPr>
+        <p:spPr>
+          <a:xfrm>
+            <a:off x="502920" y="6446520"/>
+            <a:ext cx="5486400" cy="320040"/>
+          </a:xfrm>
+          <a:prstGeom prst="rect">
+            <a:avLst/>
+          </a:prstGeom>
+          <a:noFill/>
+        </p:spPr>
+        <p:txBody>
+          <a:bodyPr wrap="none">
+            <a:spAutoFit/>
+          </a:bodyPr>
+          <a:lstStyle/>
+          <a:p>
+            <a:r>
+              <a:rPr sz="1000">
+                <a:solidFill>
+                  <a:srgbClr val="A8C4B2"/>
+                </a:solidFill>
+                <a:latin typeface="Calibri"/>
+              </a:rPr>
+              <a:t>BADM 225 · Chapter 4</a:t>
+            </a:r>
+          </a:p>
+        </p:txBody>
+      </p:sp>
+    </p:spTree>
+  </p:cSld>
+  <p:clrMapOvr>
+    <a:masterClrMapping/>
+  </p:clrMapOvr>
+</p:sld>
+</file>
+
+<file path=ppt/slides/slide31.xml><?xml version="1.0" encoding="utf-8"?>
+<p:sld xmlns:a="http://schemas.openxmlformats.org/drawingml/2006/main" xmlns:p="http://schemas.openxmlformats.org/presentationml/2006/main" xmlns:r="http://schemas.openxmlformats.org/officeDocument/2006/relationships">
+  <p:cSld>
+    <p:bg>
+      <p:bgPr>
+        <a:solidFill>
+          <a:srgbClr val="FFFFFF"/>
+        </a:solidFill>
+        <a:effectLst/>
+      </p:bgPr>
+    </p:bg>
+    <p:spTree>
+      <p:nvGrpSpPr>
+        <p:cNvPr id="1" name=""/>
+        <p:cNvGrpSpPr/>
+        <p:nvPr/>
+      </p:nvGrpSpPr>
+      <p:grpSpPr/>
+      <p:sp>
+        <p:nvSpPr>
+          <p:cNvPr id="2" name="Title 1" descr="Slide title: Your next steps"/>
+          <p:cNvSpPr>
+            <a:spLocks noGrp="1"/>
+          </p:cNvSpPr>
+          <p:nvPr>
+            <p:ph type="title"/>
+          </p:nvPr>
+        </p:nvSpPr>
+        <p:spPr>
+          <a:xfrm>
+            <a:off x="502920" y="411480"/>
+            <a:ext cx="11155680" cy="914400"/>
+          </a:xfrm>
+        </p:spPr>
+        <p:txBody>
+          <a:bodyPr wrap="square"/>
+          <a:lstStyle/>
+          <a:p>
+            <a:pPr algn="l"/>
+            <a:r>
+              <a:rPr sz="3200" b="1">
+                <a:solidFill>
+                  <a:srgbClr val="0E4D33"/>
+                </a:solidFill>
+                <a:latin typeface="Cambria"/>
+              </a:rPr>
+              <a:t>Your next steps</a:t>
+            </a:r>
+          </a:p>
+        </p:txBody>
+      </p:sp>
+      <p:sp>
+        <p:nvSpPr>
+          <p:cNvPr id="3" name="TextBox 2" descr="Footer: BADM 225 · Chapter 4"/>
+          <p:cNvSpPr txBox="1"/>
+          <p:nvPr/>
+        </p:nvSpPr>
+        <p:spPr>
+          <a:xfrm>
+            <a:off x="502920" y="6446520"/>
+            <a:ext cx="5486400" cy="320040"/>
+          </a:xfrm>
+          <a:prstGeom prst="rect">
+            <a:avLst/>
+          </a:prstGeom>
+          <a:noFill/>
+        </p:spPr>
+        <p:txBody>
+          <a:bodyPr wrap="none">
+            <a:spAutoFit/>
+          </a:bodyPr>
+          <a:lstStyle/>
+          <a:p>
+            <a:r>
+              <a:rPr sz="1000">
+                <a:solidFill>
+                  <a:srgbClr val="5E6B64"/>
+                </a:solidFill>
+                <a:latin typeface="Calibri"/>
+              </a:rPr>
+              <a:t>BADM 225 · Chapter 4</a:t>
+            </a:r>
+          </a:p>
+        </p:txBody>
+      </p:sp>
+      <p:sp>
+        <p:nvSpPr>
+          <p:cNvPr id="4" name="TextBox 3" descr="Slide number 31"/>
+          <p:cNvSpPr txBox="1"/>
+          <p:nvPr/>
+        </p:nvSpPr>
+        <p:spPr>
+          <a:xfrm>
+            <a:off x="11247120" y="6446520"/>
+            <a:ext cx="640080" cy="320040"/>
+          </a:xfrm>
+          <a:prstGeom prst="rect">
+            <a:avLst/>
+          </a:prstGeom>
+          <a:noFill/>
+        </p:spPr>
+        <p:txBody>
+          <a:bodyPr wrap="none">
+            <a:spAutoFit/>
+          </a:bodyPr>
+          <a:lstStyle/>
+          <a:p>
+            <a:pPr algn="r"/>
+            <a:r>
+              <a:rPr sz="1000">
+                <a:solidFill>
+                  <a:srgbClr val="5E6B64"/>
+                </a:solidFill>
+                <a:latin typeface="Calibri"/>
+              </a:rPr>
+              <a:t>31</a:t>
+            </a:r>
+          </a:p>
+        </p:txBody>
+      </p:sp>
+      <p:sp>
+        <p:nvSpPr>
+          <p:cNvPr id="5" name="TextBox 4" descr="Key points"/>
+          <p:cNvSpPr txBox="1"/>
+          <p:nvPr/>
+        </p:nvSpPr>
+        <p:spPr>
+          <a:xfrm>
+            <a:off x="548640" y="1554480"/>
+            <a:ext cx="11064240" cy="4663440"/>
+          </a:xfrm>
+          <a:prstGeom prst="rect">
+            <a:avLst/>
+          </a:prstGeom>
+          <a:noFill/>
+        </p:spPr>
+        <p:txBody>
+          <a:bodyPr wrap="square">
+            <a:spAutoFit/>
+          </a:bodyPr>
+          <a:lstStyle/>
+          <a:p>
+            <a:pPr algn="l">
+              <a:spcAft>
+                <a:spcPts val="1200"/>
+              </a:spcAft>
+            </a:pPr>
+            <a:r>
+              <a:rPr sz="1700">
+                <a:solidFill>
+                  <a:srgbClr val="8A6410"/>
+                </a:solidFill>
+                <a:latin typeface="Calibri"/>
+              </a:rPr>
+              <a:t>▪  </a:t>
+            </a:r>
+            <a:r>
+              <a:rPr sz="1700" b="1">
+                <a:solidFill>
+                  <a:srgbClr val="0E4D33"/>
+                </a:solidFill>
+                <a:latin typeface="Calibri"/>
+              </a:rPr>
+              <a:t>Practice:  </a:t>
+            </a:r>
+            <a:r>
+              <a:rPr sz="1700" b="0" i="0">
+                <a:solidFill>
+                  <a:srgbClr val="212A26"/>
+                </a:solidFill>
+                <a:latin typeface="Calibri"/>
+              </a:rPr>
+              <a:t>Course site → Chapter 4 → Practice questions (instant feedback, unlimited tries).</a:t>
+            </a:r>
+          </a:p>
+          <a:p>
+            <a:pPr algn="l">
+              <a:spcAft>
+                <a:spcPts val="1200"/>
+              </a:spcAft>
+            </a:pPr>
+            <a:r>
+              <a:rPr sz="1700">
+                <a:solidFill>
+                  <a:srgbClr val="8A6410"/>
+                </a:solidFill>
+                <a:latin typeface="Calibri"/>
+              </a:rPr>
+              <a:t>▪  </a:t>
+            </a:r>
+            <a:r>
+              <a:rPr sz="1700" b="1">
+                <a:solidFill>
+                  <a:srgbClr val="0E4D33"/>
+                </a:solidFill>
+                <a:latin typeface="Calibri"/>
+              </a:rPr>
+              <a:t>Graded:  </a:t>
+            </a:r>
+            <a:r>
+              <a:rPr sz="1700" b="0" i="0">
+                <a:solidFill>
+                  <a:srgbClr val="212A26"/>
+                </a:solidFill>
+                <a:latin typeface="Calibri"/>
+              </a:rPr>
+              <a:t>Complete the Chapter 4 homework on the site; paste your completion code into the Blackboard assignment before the weekly deadline.</a:t>
+            </a:r>
+          </a:p>
+          <a:p>
+            <a:pPr algn="l">
+              <a:spcAft>
+                <a:spcPts val="1200"/>
+              </a:spcAft>
+            </a:pPr>
+            <a:r>
+              <a:rPr sz="1700">
+                <a:solidFill>
+                  <a:srgbClr val="8A6410"/>
+                </a:solidFill>
+                <a:latin typeface="Calibri"/>
+              </a:rPr>
+              <a:t>▪  </a:t>
+            </a:r>
+            <a:r>
+              <a:rPr sz="1700" b="1">
+                <a:solidFill>
+                  <a:srgbClr val="0E4D33"/>
+                </a:solidFill>
+                <a:latin typeface="Calibri"/>
+              </a:rPr>
+              <a:t>Read:  </a:t>
+            </a:r>
+            <a:r>
+              <a:rPr sz="1700" b="0" i="0">
+                <a:solidFill>
+                  <a:srgbClr val="212A26"/>
+                </a:solidFill>
+                <a:latin typeface="Calibri"/>
+              </a:rPr>
+              <a:t>The Chapter 4 Study Guide — the ten-repair workshop and the full Oakhurst analysis.</a:t>
+            </a:r>
+          </a:p>
+          <a:p>
+            <a:pPr algn="l">
+              <a:spcAft>
+                <a:spcPts val="1200"/>
+              </a:spcAft>
+            </a:pPr>
+            <a:r>
+              <a:rPr sz="1700">
+                <a:solidFill>
+                  <a:srgbClr val="8A6410"/>
+                </a:solidFill>
+                <a:latin typeface="Calibri"/>
+              </a:rPr>
+              <a:t>▪  </a:t>
+            </a:r>
+            <a:r>
+              <a:rPr sz="1700" b="1">
+                <a:solidFill>
+                  <a:srgbClr val="0E4D33"/>
+                </a:solidFill>
+                <a:latin typeface="Calibri"/>
+              </a:rPr>
+              <a:t>Do:  </a:t>
+            </a:r>
+            <a:r>
+              <a:rPr sz="1700" b="0" i="0">
+                <a:solidFill>
+                  <a:srgbClr val="212A26"/>
+                </a:solidFill>
+                <a:latin typeface="Calibri"/>
+              </a:rPr>
+              <a:t>Build your five-item pre-send checklist and use it on everything with stakes this week.</a:t>
+            </a:r>
+          </a:p>
+          <a:p>
+            <a:pPr algn="l">
+              <a:spcAft>
+                <a:spcPts val="1200"/>
+              </a:spcAft>
+            </a:pPr>
+            <a:r>
+              <a:rPr sz="1700">
+                <a:solidFill>
+                  <a:srgbClr val="8A6410"/>
+                </a:solidFill>
+                <a:latin typeface="Calibri"/>
+              </a:rPr>
+              <a:t>▪  </a:t>
+            </a:r>
+            <a:r>
+              <a:rPr sz="1700" b="1">
+                <a:solidFill>
+                  <a:srgbClr val="0E4D33"/>
+                </a:solidFill>
+                <a:latin typeface="Calibri"/>
+              </a:rPr>
+              <a:t>Coming next:  </a:t>
+            </a:r>
+            <a:r>
+              <a:rPr sz="1700" b="0" i="0">
+                <a:solidFill>
+                  <a:srgbClr val="212A26"/>
+                </a:solidFill>
+                <a:latin typeface="Calibri"/>
+              </a:rPr>
+              <a:t>Unit 3 begins — Chapter 5: short workplace messages and digital media, where all four foundation chapters meet the inbox.</a:t>
             </a:r>
           </a:p>
         </p:txBody>

--- a/slides/ch04-revising-business-messages.pptx
+++ b/slides/ch04-revising-business-messages.pptx
@@ -5884,7 +5884,7 @@
                 </a:solidFill>
                 <a:latin typeface="Calibri"/>
               </a:rPr>
-              <a:t>BADM 225 · Chapter 4</a:t>
+              <a:t>BADM 225 · Chapter 4  ·  © Derek D. Bussan</a:t>
             </a:r>
           </a:p>
         </p:txBody>
@@ -6432,7 +6432,7 @@
                 </a:solidFill>
                 <a:latin typeface="Calibri"/>
               </a:rPr>
-              <a:t>BADM 225 · Chapter 4</a:t>
+              <a:t>BADM 225 · Chapter 4  ·  © Derek D. Bussan</a:t>
             </a:r>
           </a:p>
         </p:txBody>
@@ -6560,7 +6560,7 @@
                 </a:solidFill>
                 <a:latin typeface="Calibri"/>
               </a:rPr>
-              <a:t>BADM 225 · Chapter 4</a:t>
+              <a:t>BADM 225 · Chapter 4  ·  © Derek D. Bussan</a:t>
             </a:r>
           </a:p>
         </p:txBody>
@@ -7120,7 +7120,7 @@
                 </a:solidFill>
                 <a:latin typeface="Calibri"/>
               </a:rPr>
-              <a:t>BADM 225 · Chapter 4</a:t>
+              <a:t>BADM 225 · Chapter 4  ·  © Derek D. Bussan</a:t>
             </a:r>
           </a:p>
         </p:txBody>
@@ -7680,7 +7680,7 @@
                 </a:solidFill>
                 <a:latin typeface="Calibri"/>
               </a:rPr>
-              <a:t>BADM 225 · Chapter 4</a:t>
+              <a:t>BADM 225 · Chapter 4  ·  © Derek D. Bussan</a:t>
             </a:r>
           </a:p>
         </p:txBody>
@@ -7967,7 +7967,7 @@
                 </a:solidFill>
                 <a:latin typeface="Calibri"/>
               </a:rPr>
-              <a:t>BADM 225 · Chapter 4</a:t>
+              <a:t>BADM 225 · Chapter 4  ·  © Derek D. Bussan</a:t>
             </a:r>
           </a:p>
         </p:txBody>
@@ -8254,7 +8254,7 @@
                 </a:solidFill>
                 <a:latin typeface="Calibri"/>
               </a:rPr>
-              <a:t>BADM 225 · Chapter 4</a:t>
+              <a:t>BADM 225 · Chapter 4  ·  © Derek D. Bussan</a:t>
             </a:r>
           </a:p>
         </p:txBody>
@@ -8541,7 +8541,7 @@
                 </a:solidFill>
                 <a:latin typeface="Calibri"/>
               </a:rPr>
-              <a:t>BADM 225 · Chapter 4</a:t>
+              <a:t>BADM 225 · Chapter 4  ·  © Derek D. Bussan</a:t>
             </a:r>
           </a:p>
         </p:txBody>
@@ -8983,7 +8983,7 @@
                 </a:solidFill>
                 <a:latin typeface="Calibri"/>
               </a:rPr>
-              <a:t>BADM 225 · Chapter 4</a:t>
+              <a:t>BADM 225 · Chapter 4  ·  © Derek D. Bussan</a:t>
             </a:r>
           </a:p>
         </p:txBody>
@@ -9348,7 +9348,7 @@
                 </a:solidFill>
                 <a:latin typeface="Calibri"/>
               </a:rPr>
-              <a:t>BADM 225 · Chapter 4</a:t>
+              <a:t>BADM 225 · Chapter 4  ·  © Derek D. Bussan</a:t>
             </a:r>
           </a:p>
         </p:txBody>
@@ -9476,7 +9476,7 @@
                 </a:solidFill>
                 <a:latin typeface="Calibri"/>
               </a:rPr>
-              <a:t>BADM 225 · Chapter 4</a:t>
+              <a:t>BADM 225 · Chapter 4  ·  © Derek D. Bussan</a:t>
             </a:r>
           </a:p>
         </p:txBody>
@@ -9797,7 +9797,7 @@
                 </a:solidFill>
                 <a:latin typeface="Calibri"/>
               </a:rPr>
-              <a:t>BADM 225 · Chapter 4</a:t>
+              <a:t>BADM 225 · Chapter 4  ·  © Derek D. Bussan</a:t>
             </a:r>
           </a:p>
         </p:txBody>
@@ -10118,7 +10118,7 @@
                 </a:solidFill>
                 <a:latin typeface="Calibri"/>
               </a:rPr>
-              <a:t>BADM 225 · Chapter 4</a:t>
+              <a:t>BADM 225 · Chapter 4  ·  © Derek D. Bussan</a:t>
             </a:r>
           </a:p>
         </p:txBody>
@@ -10560,7 +10560,7 @@
                 </a:solidFill>
                 <a:latin typeface="Calibri"/>
               </a:rPr>
-              <a:t>BADM 225 · Chapter 4</a:t>
+              <a:t>BADM 225 · Chapter 4  ·  © Derek D. Bussan</a:t>
             </a:r>
           </a:p>
         </p:txBody>
@@ -10847,7 +10847,7 @@
                 </a:solidFill>
                 <a:latin typeface="Calibri"/>
               </a:rPr>
-              <a:t>BADM 225 · Chapter 4</a:t>
+              <a:t>BADM 225 · Chapter 4  ·  © Derek D. Bussan</a:t>
             </a:r>
           </a:p>
         </p:txBody>
@@ -11212,7 +11212,7 @@
                 </a:solidFill>
                 <a:latin typeface="Calibri"/>
               </a:rPr>
-              <a:t>BADM 225 · Chapter 4</a:t>
+              <a:t>BADM 225 · Chapter 4  ·  © Derek D. Bussan</a:t>
             </a:r>
           </a:p>
         </p:txBody>
@@ -11340,7 +11340,7 @@
                 </a:solidFill>
                 <a:latin typeface="Calibri"/>
               </a:rPr>
-              <a:t>BADM 225 · Chapter 4</a:t>
+              <a:t>BADM 225 · Chapter 4  ·  © Derek D. Bussan</a:t>
             </a:r>
           </a:p>
         </p:txBody>
@@ -12047,7 +12047,7 @@
                 </a:solidFill>
                 <a:latin typeface="Calibri"/>
               </a:rPr>
-              <a:t>BADM 225 · Chapter 4</a:t>
+              <a:t>BADM 225 · Chapter 4  ·  © Derek D. Bussan</a:t>
             </a:r>
           </a:p>
         </p:txBody>
@@ -12368,7 +12368,7 @@
                 </a:solidFill>
                 <a:latin typeface="Calibri"/>
               </a:rPr>
-              <a:t>BADM 225 · Chapter 4</a:t>
+              <a:t>BADM 225 · Chapter 4  ·  © Derek D. Bussan</a:t>
             </a:r>
           </a:p>
         </p:txBody>
@@ -12655,7 +12655,7 @@
                 </a:solidFill>
                 <a:latin typeface="Calibri"/>
               </a:rPr>
-              <a:t>BADM 225 · Chapter 4</a:t>
+              <a:t>BADM 225 · Chapter 4  ·  © Derek D. Bussan</a:t>
             </a:r>
           </a:p>
         </p:txBody>
@@ -13470,7 +13470,7 @@
                 </a:solidFill>
                 <a:latin typeface="Calibri"/>
               </a:rPr>
-              <a:t>BADM 225 · Chapter 4</a:t>
+              <a:t>BADM 225 · Chapter 4  ·  © Derek D. Bussan</a:t>
             </a:r>
           </a:p>
         </p:txBody>
@@ -13676,7 +13676,7 @@
                 </a:solidFill>
                 <a:latin typeface="Calibri"/>
               </a:rPr>
-              <a:t>BADM 225 · Chapter 4</a:t>
+              <a:t>BADM 225 · Chapter 4  ·  © Derek D. Bussan</a:t>
             </a:r>
           </a:p>
         </p:txBody>
@@ -13952,7 +13952,7 @@
                 </a:solidFill>
                 <a:latin typeface="Calibri"/>
               </a:rPr>
-              <a:t>BADM 225 · Chapter 4</a:t>
+              <a:t>BADM 225 · Chapter 4  ·  © Derek D. Bussan</a:t>
             </a:r>
           </a:p>
         </p:txBody>
@@ -14045,7 +14045,7 @@
                 </a:solidFill>
                 <a:latin typeface="Calibri"/>
               </a:rPr>
-              <a:t>BADM 225 · Chapter 4</a:t>
+              <a:t>BADM 225 · Chapter 4  ·  © Derek D. Bussan</a:t>
             </a:r>
           </a:p>
         </p:txBody>
@@ -14366,7 +14366,7 @@
                 </a:solidFill>
                 <a:latin typeface="Calibri"/>
               </a:rPr>
-              <a:t>BADM 225 · Chapter 4</a:t>
+              <a:t>BADM 225 · Chapter 4  ·  © Derek D. Bussan</a:t>
             </a:r>
           </a:p>
         </p:txBody>
@@ -14836,7 +14836,7 @@
                 </a:solidFill>
                 <a:latin typeface="Calibri"/>
               </a:rPr>
-              <a:t>BADM 225 · Chapter 4</a:t>
+              <a:t>BADM 225 · Chapter 4  ·  © Derek D. Bussan</a:t>
             </a:r>
           </a:p>
         </p:txBody>
@@ -15201,7 +15201,7 @@
                 </a:solidFill>
                 <a:latin typeface="Calibri"/>
               </a:rPr>
-              <a:t>BADM 225 · Chapter 4</a:t>
+              <a:t>BADM 225 · Chapter 4  ·  © Derek D. Bussan</a:t>
             </a:r>
           </a:p>
         </p:txBody>
@@ -15329,7 +15329,7 @@
                 </a:solidFill>
                 <a:latin typeface="Calibri"/>
               </a:rPr>
-              <a:t>BADM 225 · Chapter 4</a:t>
+              <a:t>BADM 225 · Chapter 4  ·  © Derek D. Bussan</a:t>
             </a:r>
           </a:p>
         </p:txBody>
@@ -15997,7 +15997,7 @@
                 </a:solidFill>
                 <a:latin typeface="Calibri"/>
               </a:rPr>
-              <a:t>BADM 225 · Chapter 4</a:t>
+              <a:t>BADM 225 · Chapter 4  ·  © Derek D. Bussan</a:t>
             </a:r>
           </a:p>
         </p:txBody>
@@ -16401,7 +16401,7 @@
                 </a:solidFill>
                 <a:latin typeface="Calibri"/>
               </a:rPr>
-              <a:t>BADM 225 · Chapter 4</a:t>
+              <a:t>BADM 225 · Chapter 4  ·  © Derek D. Bussan</a:t>
             </a:r>
           </a:p>
         </p:txBody>

--- a/slides/ch04-revising-business-messages.pptx
+++ b/slides/ch04-revising-business-messages.pptx
@@ -5791,7 +5791,7 @@
                 </a:solidFill>
                 <a:latin typeface="Calibri"/>
               </a:rPr>
-              <a:t>BADM 225 · Chapter 4  ·  Original instructional material — no publisher content</a:t>
+              <a:t>BADM 225 · Chapter 4  ·  Original material © 2026 Derek D. Bussan, PhD, MBA  ·  No publisher content</a:t>
             </a:r>
           </a:p>
         </p:txBody>
